--- a/resources/year8/L8_Consolidation_and_Review_Weeks_1-2.pptx
+++ b/resources/year8/L8_Consolidation_and_Review_Weeks_1-2.pptx
@@ -14,7 +14,7 @@
     <p:sldId id="262" r:id="rId13"/>
     <p:sldId id="263" r:id="rId14"/>
   </p:sldIdLst>
-  <p:sldSz cx="12191695" cy="6858000" type="screen4x3"/>
+  <p:sldSz cx="12192000" cy="6858000" type="screen4x3"/>
   <p:notesSz cx="6858000" cy="9144000"/>
   <p:defaultTextStyle>
     <a:defPPr>
@@ -3120,19 +3120,12 @@
           <a:noFill/>
         </p:spPr>
         <p:txBody>
-          <a:bodyPr wrap="square" anchor="t" lIns="0" rIns="0" tIns="0" bIns="0">
-            <a:spAutoFit/>
-          </a:bodyPr>
-          <a:lstStyle/>
-          <a:p>
-            <a:pPr algn="l">
-              <a:spcBef>
-                <a:spcPts val="0"/>
-              </a:spcBef>
-              <a:spcAft>
-                <a:spcPts val="800"/>
-              </a:spcAft>
-            </a:pPr>
+          <a:bodyPr wrap="square">
+            <a:spAutoFit/>
+          </a:bodyPr>
+          <a:lstStyle/>
+          <a:p>
+            <a:pPr algn="l"/>
             <a:r>
               <a:rPr sz="1500" b="1" i="0">
                 <a:solidFill>
@@ -3162,19 +3155,12 @@
           <a:noFill/>
         </p:spPr>
         <p:txBody>
-          <a:bodyPr wrap="square" anchor="t" lIns="0" rIns="0" tIns="0" bIns="0">
-            <a:spAutoFit/>
-          </a:bodyPr>
-          <a:lstStyle/>
-          <a:p>
-            <a:pPr algn="r">
-              <a:spcBef>
-                <a:spcPts val="0"/>
-              </a:spcBef>
-              <a:spcAft>
-                <a:spcPts val="800"/>
-              </a:spcAft>
-            </a:pPr>
+          <a:bodyPr wrap="square">
+            <a:spAutoFit/>
+          </a:bodyPr>
+          <a:lstStyle/>
+          <a:p>
+            <a:pPr algn="r"/>
             <a:r>
               <a:rPr sz="1300" b="0" i="0">
                 <a:solidFill>
@@ -3204,19 +3190,12 @@
           <a:noFill/>
         </p:spPr>
         <p:txBody>
-          <a:bodyPr wrap="square" anchor="t" lIns="0" rIns="0" tIns="0" bIns="0">
-            <a:spAutoFit/>
-          </a:bodyPr>
-          <a:lstStyle/>
-          <a:p>
-            <a:pPr algn="l">
-              <a:spcBef>
-                <a:spcPts val="0"/>
-              </a:spcBef>
-              <a:spcAft>
-                <a:spcPts val="800"/>
-              </a:spcAft>
-            </a:pPr>
+          <a:bodyPr wrap="square">
+            <a:spAutoFit/>
+          </a:bodyPr>
+          <a:lstStyle/>
+          <a:p>
+            <a:pPr algn="l"/>
             <a:r>
               <a:rPr sz="3400" b="1" i="0">
                 <a:solidFill>
@@ -3246,21 +3225,14 @@
           <a:noFill/>
         </p:spPr>
         <p:txBody>
-          <a:bodyPr wrap="square" anchor="t" lIns="0" rIns="0" tIns="0" bIns="0">
-            <a:spAutoFit/>
-          </a:bodyPr>
-          <a:lstStyle/>
-          <a:p>
-            <a:pPr algn="l">
-              <a:spcBef>
-                <a:spcPts val="0"/>
-              </a:spcBef>
-              <a:spcAft>
-                <a:spcPts val="800"/>
-              </a:spcAft>
-            </a:pPr>
-            <a:r>
-              <a:rPr sz="1600" b="0" i="1">
+          <a:bodyPr wrap="square">
+            <a:spAutoFit/>
+          </a:bodyPr>
+          <a:lstStyle/>
+          <a:p>
+            <a:pPr algn="l"/>
+            <a:r>
+              <a:rPr sz="1600" b="0" i="0">
                 <a:solidFill>
                   <a:srgbClr val="595959"/>
                 </a:solidFill>
@@ -3288,21 +3260,14 @@
           <a:noFill/>
         </p:spPr>
         <p:txBody>
-          <a:bodyPr wrap="square" anchor="t" lIns="0" rIns="0" tIns="0" bIns="0">
-            <a:spAutoFit/>
-          </a:bodyPr>
-          <a:lstStyle/>
-          <a:p>
-            <a:pPr algn="l">
-              <a:spcBef>
-                <a:spcPts val="0"/>
-              </a:spcBef>
-              <a:spcAft>
-                <a:spcPts val="800"/>
-              </a:spcAft>
-            </a:pPr>
-            <a:r>
-              <a:rPr sz="1600" b="1" i="0">
+          <a:bodyPr wrap="square">
+            <a:spAutoFit/>
+          </a:bodyPr>
+          <a:lstStyle/>
+          <a:p>
+            <a:pPr algn="l"/>
+            <a:r>
+              <a:rPr sz="1500" b="1" i="0">
                 <a:solidFill>
                   <a:srgbClr val="595959"/>
                 </a:solidFill>
@@ -3330,19 +3295,12 @@
           <a:noFill/>
         </p:spPr>
         <p:txBody>
-          <a:bodyPr wrap="square" anchor="t" lIns="0" rIns="0" tIns="0" bIns="0">
-            <a:spAutoFit/>
-          </a:bodyPr>
-          <a:lstStyle/>
-          <a:p>
-            <a:pPr algn="l">
-              <a:spcBef>
-                <a:spcPts val="0"/>
-              </a:spcBef>
-              <a:spcAft>
-                <a:spcPts val="800"/>
-              </a:spcAft>
-            </a:pPr>
+          <a:bodyPr wrap="square">
+            <a:spAutoFit/>
+          </a:bodyPr>
+          <a:lstStyle/>
+          <a:p>
+            <a:pPr algn="l"/>
             <a:r>
               <a:rPr sz="2200" b="0" i="0">
                 <a:solidFill>
@@ -3350,7 +3308,7 @@
                 </a:solidFill>
                 <a:latin typeface="Arial"/>
               </a:rPr>
-              <a:t>1.  Solve: x − 8 = -3</a:t>
+              <a:t>1.  Convert 5/8 to a percentage.</a:t>
             </a:r>
           </a:p>
         </p:txBody>
@@ -3372,19 +3330,12 @@
           <a:noFill/>
         </p:spPr>
         <p:txBody>
-          <a:bodyPr wrap="square" anchor="t" lIns="0" rIns="0" tIns="0" bIns="0">
-            <a:spAutoFit/>
-          </a:bodyPr>
-          <a:lstStyle/>
-          <a:p>
-            <a:pPr algn="l">
-              <a:spcBef>
-                <a:spcPts val="0"/>
-              </a:spcBef>
-              <a:spcAft>
-                <a:spcPts val="800"/>
-              </a:spcAft>
-            </a:pPr>
+          <a:bodyPr wrap="square">
+            <a:spAutoFit/>
+          </a:bodyPr>
+          <a:lstStyle/>
+          <a:p>
+            <a:pPr algn="l"/>
             <a:r>
               <a:rPr sz="2000" b="0" i="0">
                 <a:solidFill>
@@ -3392,7 +3343,7 @@
                 </a:solidFill>
                 <a:latin typeface="Arial"/>
               </a:rPr>
-              <a:t>x = 5</a:t>
+              <a:t>62.5%</a:t>
             </a:r>
           </a:p>
         </p:txBody>
@@ -3414,19 +3365,12 @@
           <a:noFill/>
         </p:spPr>
         <p:txBody>
-          <a:bodyPr wrap="square" anchor="t" lIns="0" rIns="0" tIns="0" bIns="0">
-            <a:spAutoFit/>
-          </a:bodyPr>
-          <a:lstStyle/>
-          <a:p>
-            <a:pPr algn="l">
-              <a:spcBef>
-                <a:spcPts val="0"/>
-              </a:spcBef>
-              <a:spcAft>
-                <a:spcPts val="800"/>
-              </a:spcAft>
-            </a:pPr>
+          <a:bodyPr wrap="square">
+            <a:spAutoFit/>
+          </a:bodyPr>
+          <a:lstStyle/>
+          <a:p>
+            <a:pPr algn="l"/>
             <a:r>
               <a:rPr sz="2200" b="0" i="0">
                 <a:solidFill>
@@ -3434,7 +3378,7 @@
                 </a:solidFill>
                 <a:latin typeface="Arial"/>
               </a:rPr>
-              <a:t>2.  Solve: 6x = -30</a:t>
+              <a:t>2.  Find 45% of 80 using a multiplier.</a:t>
             </a:r>
           </a:p>
         </p:txBody>
@@ -3456,19 +3400,12 @@
           <a:noFill/>
         </p:spPr>
         <p:txBody>
-          <a:bodyPr wrap="square" anchor="t" lIns="0" rIns="0" tIns="0" bIns="0">
-            <a:spAutoFit/>
-          </a:bodyPr>
-          <a:lstStyle/>
-          <a:p>
-            <a:pPr algn="l">
-              <a:spcBef>
-                <a:spcPts val="0"/>
-              </a:spcBef>
-              <a:spcAft>
-                <a:spcPts val="800"/>
-              </a:spcAft>
-            </a:pPr>
+          <a:bodyPr wrap="square">
+            <a:spAutoFit/>
+          </a:bodyPr>
+          <a:lstStyle/>
+          <a:p>
+            <a:pPr algn="l"/>
             <a:r>
               <a:rPr sz="2000" b="0" i="0">
                 <a:solidFill>
@@ -3476,7 +3413,7 @@
                 </a:solidFill>
                 <a:latin typeface="Arial"/>
               </a:rPr>
-              <a:t>x = -5</a:t>
+              <a:t>36</a:t>
             </a:r>
           </a:p>
         </p:txBody>
@@ -3498,19 +3435,12 @@
           <a:noFill/>
         </p:spPr>
         <p:txBody>
-          <a:bodyPr wrap="square" anchor="t" lIns="0" rIns="0" tIns="0" bIns="0">
-            <a:spAutoFit/>
-          </a:bodyPr>
-          <a:lstStyle/>
-          <a:p>
-            <a:pPr algn="l">
-              <a:spcBef>
-                <a:spcPts val="0"/>
-              </a:spcBef>
-              <a:spcAft>
-                <a:spcPts val="800"/>
-              </a:spcAft>
-            </a:pPr>
+          <a:bodyPr wrap="square">
+            <a:spAutoFit/>
+          </a:bodyPr>
+          <a:lstStyle/>
+          <a:p>
+            <a:pPr algn="l"/>
             <a:r>
               <a:rPr sz="2200" b="0" i="0">
                 <a:solidFill>
@@ -3518,7 +3448,7 @@
                 </a:solidFill>
                 <a:latin typeface="Arial"/>
               </a:rPr>
-              <a:t>3.  Solve: 3x + 4 = 19</a:t>
+              <a:t>3.  Increase £65 by 50%.</a:t>
             </a:r>
           </a:p>
         </p:txBody>
@@ -3540,19 +3470,12 @@
           <a:noFill/>
         </p:spPr>
         <p:txBody>
-          <a:bodyPr wrap="square" anchor="t" lIns="0" rIns="0" tIns="0" bIns="0">
-            <a:spAutoFit/>
-          </a:bodyPr>
-          <a:lstStyle/>
-          <a:p>
-            <a:pPr algn="l">
-              <a:spcBef>
-                <a:spcPts val="0"/>
-              </a:spcBef>
-              <a:spcAft>
-                <a:spcPts val="800"/>
-              </a:spcAft>
-            </a:pPr>
+          <a:bodyPr wrap="square">
+            <a:spAutoFit/>
+          </a:bodyPr>
+          <a:lstStyle/>
+          <a:p>
+            <a:pPr algn="l"/>
             <a:r>
               <a:rPr sz="2000" b="0" i="0">
                 <a:solidFill>
@@ -3560,7 +3483,7 @@
                 </a:solidFill>
                 <a:latin typeface="Arial"/>
               </a:rPr>
-              <a:t>x = 5</a:t>
+              <a:t>£97.50</a:t>
             </a:r>
           </a:p>
         </p:txBody>
@@ -3582,19 +3505,12 @@
           <a:noFill/>
         </p:spPr>
         <p:txBody>
-          <a:bodyPr wrap="square" anchor="t" lIns="0" rIns="0" tIns="0" bIns="0">
-            <a:spAutoFit/>
-          </a:bodyPr>
-          <a:lstStyle/>
-          <a:p>
-            <a:pPr algn="l">
-              <a:spcBef>
-                <a:spcPts val="0"/>
-              </a:spcBef>
-              <a:spcAft>
-                <a:spcPts val="800"/>
-              </a:spcAft>
-            </a:pPr>
+          <a:bodyPr wrap="square">
+            <a:spAutoFit/>
+          </a:bodyPr>
+          <a:lstStyle/>
+          <a:p>
+            <a:pPr algn="l"/>
             <a:r>
               <a:rPr sz="2200" b="0" i="0">
                 <a:solidFill>
@@ -3602,7 +3518,7 @@
                 </a:solidFill>
                 <a:latin typeface="Arial"/>
               </a:rPr>
-              <a:t>4.  Solve: -2x + 5 = 11</a:t>
+              <a:t>4.  New price £108 after an 8% increase. Find the original price.</a:t>
             </a:r>
           </a:p>
         </p:txBody>
@@ -3624,19 +3540,12 @@
           <a:noFill/>
         </p:spPr>
         <p:txBody>
-          <a:bodyPr wrap="square" anchor="t" lIns="0" rIns="0" tIns="0" bIns="0">
-            <a:spAutoFit/>
-          </a:bodyPr>
-          <a:lstStyle/>
-          <a:p>
-            <a:pPr algn="l">
-              <a:spcBef>
-                <a:spcPts val="0"/>
-              </a:spcBef>
-              <a:spcAft>
-                <a:spcPts val="800"/>
-              </a:spcAft>
-            </a:pPr>
+          <a:bodyPr wrap="square">
+            <a:spAutoFit/>
+          </a:bodyPr>
+          <a:lstStyle/>
+          <a:p>
+            <a:pPr algn="l"/>
             <a:r>
               <a:rPr sz="2000" b="0" i="0">
                 <a:solidFill>
@@ -3644,7 +3553,7 @@
                 </a:solidFill>
                 <a:latin typeface="Arial"/>
               </a:rPr>
-              <a:t>x = -3</a:t>
+              <a:t>£100</a:t>
             </a:r>
           </a:p>
         </p:txBody>
@@ -3666,19 +3575,12 @@
           <a:noFill/>
         </p:spPr>
         <p:txBody>
-          <a:bodyPr wrap="square" anchor="t" lIns="0" rIns="0" tIns="0" bIns="0">
-            <a:spAutoFit/>
-          </a:bodyPr>
-          <a:lstStyle/>
-          <a:p>
-            <a:pPr algn="l">
-              <a:spcBef>
-                <a:spcPts val="0"/>
-              </a:spcBef>
-              <a:spcAft>
-                <a:spcPts val="800"/>
-              </a:spcAft>
-            </a:pPr>
+          <a:bodyPr wrap="square">
+            <a:spAutoFit/>
+          </a:bodyPr>
+          <a:lstStyle/>
+          <a:p>
+            <a:pPr algn="l"/>
             <a:r>
               <a:rPr sz="2200" b="0" i="0">
                 <a:solidFill>
@@ -3686,7 +3588,7 @@
                 </a:solidFill>
                 <a:latin typeface="Arial"/>
               </a:rPr>
-              <a:t>5.  Solve: x ÷ 4 − 2 = 1</a:t>
+              <a:t>5.  A bill is £46 including a 15% service charge. Find the price before the charge.</a:t>
             </a:r>
           </a:p>
         </p:txBody>
@@ -3708,19 +3610,12 @@
           <a:noFill/>
         </p:spPr>
         <p:txBody>
-          <a:bodyPr wrap="square" anchor="t" lIns="0" rIns="0" tIns="0" bIns="0">
-            <a:spAutoFit/>
-          </a:bodyPr>
-          <a:lstStyle/>
-          <a:p>
-            <a:pPr algn="l">
-              <a:spcBef>
-                <a:spcPts val="0"/>
-              </a:spcBef>
-              <a:spcAft>
-                <a:spcPts val="800"/>
-              </a:spcAft>
-            </a:pPr>
+          <a:bodyPr wrap="square">
+            <a:spAutoFit/>
+          </a:bodyPr>
+          <a:lstStyle/>
+          <a:p>
+            <a:pPr algn="l"/>
             <a:r>
               <a:rPr sz="2000" b="0" i="0">
                 <a:solidFill>
@@ -3728,7 +3623,7 @@
                 </a:solidFill>
                 <a:latin typeface="Arial"/>
               </a:rPr>
-              <a:t>x = 12</a:t>
+              <a:t>£40</a:t>
             </a:r>
           </a:p>
         </p:txBody>
@@ -3750,19 +3645,12 @@
           <a:noFill/>
         </p:spPr>
         <p:txBody>
-          <a:bodyPr wrap="square" anchor="t" lIns="0" rIns="0" tIns="0" bIns="0">
-            <a:spAutoFit/>
-          </a:bodyPr>
-          <a:lstStyle/>
-          <a:p>
-            <a:pPr algn="l">
-              <a:spcBef>
-                <a:spcPts val="0"/>
-              </a:spcBef>
-              <a:spcAft>
-                <a:spcPts val="800"/>
-              </a:spcAft>
-            </a:pPr>
+          <a:bodyPr wrap="square">
+            <a:spAutoFit/>
+          </a:bodyPr>
+          <a:lstStyle/>
+          <a:p>
+            <a:pPr algn="l"/>
             <a:r>
               <a:rPr sz="1100" b="0" i="0">
                 <a:solidFill>
@@ -3770,7 +3658,7 @@
                 </a:solidFill>
                 <a:latin typeface="Arial"/>
               </a:rPr>
-              <a:t>Y8 Solving Linear Equations — Lower-to-Middle Set</a:t>
+              <a:t>Y8 Percentages and Proportionality — Middle Set</a:t>
             </a:r>
           </a:p>
         </p:txBody>
@@ -3818,275 +3706,231 @@
           <a:noFill/>
         </p:spPr>
         <p:txBody>
-          <a:bodyPr wrap="square" anchor="t" lIns="0" rIns="0" tIns="0" bIns="0">
+          <a:bodyPr wrap="square">
+            <a:spAutoFit/>
+          </a:bodyPr>
+          <a:lstStyle/>
+          <a:p>
+            <a:pPr algn="l"/>
+            <a:r>
+              <a:rPr sz="1500" b="1" i="0">
+                <a:solidFill>
+                  <a:srgbClr val="595959"/>
+                </a:solidFill>
+                <a:latin typeface="Arial"/>
+              </a:rPr>
+              <a:t>WEEK 2 · LESSON 4 OF 4</a:t>
+            </a:r>
+          </a:p>
+        </p:txBody>
+      </p:sp>
+      <p:sp>
+        <p:nvSpPr>
+          <p:cNvPr id="3" name="TextBox 2"/>
+          <p:cNvSpPr txBox="1"/>
+          <p:nvPr/>
+        </p:nvSpPr>
+        <p:spPr>
+          <a:xfrm>
+            <a:off x="7619695" y="256032"/>
+            <a:ext cx="4114800" cy="365760"/>
+          </a:xfrm>
+          <a:prstGeom prst="rect">
+            <a:avLst/>
+          </a:prstGeom>
+          <a:noFill/>
+        </p:spPr>
+        <p:txBody>
+          <a:bodyPr wrap="square">
+            <a:spAutoFit/>
+          </a:bodyPr>
+          <a:lstStyle/>
+          <a:p>
+            <a:pPr algn="r"/>
+            <a:r>
+              <a:rPr sz="1300" b="0" i="0">
+                <a:solidFill>
+                  <a:srgbClr val="595959"/>
+                </a:solidFill>
+                <a:latin typeface="Arial"/>
+              </a:rPr>
+              <a:t>L8</a:t>
+            </a:r>
+          </a:p>
+        </p:txBody>
+      </p:sp>
+      <p:sp>
+        <p:nvSpPr>
+          <p:cNvPr id="4" name="TextBox 3"/>
+          <p:cNvSpPr txBox="1"/>
+          <p:nvPr/>
+        </p:nvSpPr>
+        <p:spPr>
+          <a:xfrm>
+            <a:off x="457200" y="868680"/>
+            <a:ext cx="7772400" cy="365760"/>
+          </a:xfrm>
+          <a:prstGeom prst="rect">
+            <a:avLst/>
+          </a:prstGeom>
+          <a:noFill/>
+        </p:spPr>
+        <p:txBody>
+          <a:bodyPr wrap="square">
+            <a:spAutoFit/>
+          </a:bodyPr>
+          <a:lstStyle/>
+          <a:p>
+            <a:pPr algn="l"/>
+            <a:r>
+              <a:rPr sz="1600" b="0" i="0">
+                <a:solidFill>
+                  <a:srgbClr val="595959"/>
+                </a:solidFill>
+                <a:latin typeface="Arial"/>
+              </a:rPr>
+              <a:t>Date: _______________________</a:t>
+            </a:r>
+          </a:p>
+        </p:txBody>
+      </p:sp>
+      <p:sp>
+        <p:nvSpPr>
+          <p:cNvPr id="5" name="TextBox 4"/>
+          <p:cNvSpPr txBox="1"/>
+          <p:nvPr/>
+        </p:nvSpPr>
+        <p:spPr>
+          <a:xfrm>
+            <a:off x="457200" y="1417320"/>
+            <a:ext cx="11277295" cy="1188720"/>
+          </a:xfrm>
+          <a:prstGeom prst="rect">
+            <a:avLst/>
+          </a:prstGeom>
+          <a:noFill/>
+        </p:spPr>
+        <p:txBody>
+          <a:bodyPr wrap="square">
+            <a:spAutoFit/>
+          </a:bodyPr>
+          <a:lstStyle/>
+          <a:p>
+            <a:pPr algn="l"/>
+            <a:r>
+              <a:rPr sz="3800" b="1" i="0">
+                <a:solidFill>
+                  <a:srgbClr val="000000"/>
+                </a:solidFill>
+                <a:latin typeface="Arial"/>
+              </a:rPr>
+              <a:t>Consolidation and Review (Weeks 1–2)</a:t>
+            </a:r>
+          </a:p>
+        </p:txBody>
+      </p:sp>
+      <p:sp>
+        <p:nvSpPr>
+          <p:cNvPr id="6" name="TextBox 5"/>
+          <p:cNvSpPr txBox="1"/>
+          <p:nvPr/>
+        </p:nvSpPr>
+        <p:spPr>
+          <a:xfrm>
+            <a:off x="457200" y="2788920"/>
+            <a:ext cx="6949440" cy="365760"/>
+          </a:xfrm>
+          <a:prstGeom prst="rect">
+            <a:avLst/>
+          </a:prstGeom>
+          <a:noFill/>
+        </p:spPr>
+        <p:txBody>
+          <a:bodyPr wrap="square">
+            <a:spAutoFit/>
+          </a:bodyPr>
+          <a:lstStyle/>
+          <a:p>
+            <a:pPr algn="l"/>
+            <a:r>
+              <a:rPr sz="2000" b="1" i="0">
+                <a:solidFill>
+                  <a:srgbClr val="000000"/>
+                </a:solidFill>
+                <a:latin typeface="Arial"/>
+              </a:rPr>
+              <a:t>Learning Objectives</a:t>
+            </a:r>
+          </a:p>
+        </p:txBody>
+      </p:sp>
+      <p:sp>
+        <p:nvSpPr>
+          <p:cNvPr id="7" name="TextBox 6"/>
+          <p:cNvSpPr txBox="1"/>
+          <p:nvPr/>
+        </p:nvSpPr>
+        <p:spPr>
+          <a:xfrm>
+            <a:off x="457200" y="3246120"/>
+            <a:ext cx="6949440" cy="1645920"/>
+          </a:xfrm>
+          <a:prstGeom prst="rect">
+            <a:avLst/>
+          </a:prstGeom>
+          <a:noFill/>
+        </p:spPr>
+        <p:txBody>
+          <a:bodyPr wrap="square">
             <a:spAutoFit/>
           </a:bodyPr>
           <a:lstStyle/>
           <a:p>
             <a:pPr algn="l">
-              <a:spcBef>
-                <a:spcPts val="0"/>
-              </a:spcBef>
               <a:spcAft>
                 <a:spcPts val="800"/>
               </a:spcAft>
             </a:pPr>
             <a:r>
-              <a:rPr sz="1500" b="1" i="0">
-                <a:solidFill>
-                  <a:srgbClr val="595959"/>
-                </a:solidFill>
-                <a:latin typeface="Arial"/>
-              </a:rPr>
-              <a:t>WEEK 2 · LESSON 4 OF 4</a:t>
-            </a:r>
-          </a:p>
-        </p:txBody>
-      </p:sp>
-      <p:sp>
-        <p:nvSpPr>
-          <p:cNvPr id="3" name="TextBox 2"/>
-          <p:cNvSpPr txBox="1"/>
-          <p:nvPr/>
-        </p:nvSpPr>
-        <p:spPr>
-          <a:xfrm>
-            <a:off x="7619695" y="256032"/>
-            <a:ext cx="4114800" cy="365760"/>
-          </a:xfrm>
-          <a:prstGeom prst="rect">
-            <a:avLst/>
-          </a:prstGeom>
-          <a:noFill/>
-        </p:spPr>
-        <p:txBody>
-          <a:bodyPr wrap="square" anchor="t" lIns="0" rIns="0" tIns="0" bIns="0">
-            <a:spAutoFit/>
-          </a:bodyPr>
-          <a:lstStyle/>
-          <a:p>
-            <a:pPr algn="r">
-              <a:spcBef>
-                <a:spcPts val="0"/>
-              </a:spcBef>
+              <a:rPr sz="2200" b="0">
+                <a:solidFill>
+                  <a:srgbClr val="000000"/>
+                </a:solidFill>
+                <a:latin typeface="Arial"/>
+              </a:rPr>
+              <a:t>-  Consolidate finding percentages, percentage change and reverse percentages</a:t>
+            </a:r>
+          </a:p>
+          <a:p>
+            <a:pPr algn="l">
               <a:spcAft>
                 <a:spcPts val="800"/>
               </a:spcAft>
             </a:pPr>
             <a:r>
-              <a:rPr sz="1300" b="0" i="0">
-                <a:solidFill>
-                  <a:srgbClr val="595959"/>
-                </a:solidFill>
-                <a:latin typeface="Arial"/>
-              </a:rPr>
-              <a:t>L8</a:t>
-            </a:r>
-          </a:p>
-        </p:txBody>
-      </p:sp>
-      <p:sp>
-        <p:nvSpPr>
-          <p:cNvPr id="4" name="TextBox 3"/>
-          <p:cNvSpPr txBox="1"/>
-          <p:nvPr/>
-        </p:nvSpPr>
-        <p:spPr>
-          <a:xfrm>
-            <a:off x="457200" y="868680"/>
-            <a:ext cx="7772400" cy="365760"/>
-          </a:xfrm>
-          <a:prstGeom prst="rect">
-            <a:avLst/>
-          </a:prstGeom>
-          <a:noFill/>
-        </p:spPr>
-        <p:txBody>
-          <a:bodyPr wrap="square" anchor="t" lIns="0" rIns="0" tIns="0" bIns="0">
-            <a:spAutoFit/>
-          </a:bodyPr>
-          <a:lstStyle/>
+              <a:rPr sz="2200" b="0">
+                <a:solidFill>
+                  <a:srgbClr val="000000"/>
+                </a:solidFill>
+                <a:latin typeface="Arial"/>
+              </a:rPr>
+              <a:t>-  Select the correct method for a given problem</a:t>
+            </a:r>
+          </a:p>
           <a:p>
             <a:pPr algn="l">
-              <a:spcBef>
-                <a:spcPts val="0"/>
-              </a:spcBef>
               <a:spcAft>
                 <a:spcPts val="800"/>
               </a:spcAft>
             </a:pPr>
             <a:r>
-              <a:rPr sz="1600" b="0" i="0">
-                <a:solidFill>
-                  <a:srgbClr val="595959"/>
-                </a:solidFill>
-                <a:latin typeface="Arial"/>
-              </a:rPr>
-              <a:t>Date: _______________________</a:t>
-            </a:r>
-          </a:p>
-        </p:txBody>
-      </p:sp>
-      <p:sp>
-        <p:nvSpPr>
-          <p:cNvPr id="5" name="TextBox 4"/>
-          <p:cNvSpPr txBox="1"/>
-          <p:nvPr/>
-        </p:nvSpPr>
-        <p:spPr>
-          <a:xfrm>
-            <a:off x="457200" y="1417320"/>
-            <a:ext cx="11277295" cy="1188720"/>
-          </a:xfrm>
-          <a:prstGeom prst="rect">
-            <a:avLst/>
-          </a:prstGeom>
-          <a:noFill/>
-        </p:spPr>
-        <p:txBody>
-          <a:bodyPr wrap="square" anchor="ctr" lIns="0" rIns="0" tIns="0" bIns="0">
-            <a:spAutoFit/>
-          </a:bodyPr>
-          <a:lstStyle/>
-          <a:p>
-            <a:pPr algn="l">
-              <a:spcBef>
-                <a:spcPts val="0"/>
-              </a:spcBef>
-              <a:spcAft>
-                <a:spcPts val="800"/>
-              </a:spcAft>
-            </a:pPr>
-            <a:r>
-              <a:rPr sz="3800" b="1" i="0">
+              <a:rPr sz="2200" b="0">
                 <a:solidFill>
                   <a:srgbClr val="000000"/>
                 </a:solidFill>
                 <a:latin typeface="Arial"/>
               </a:rPr>
-              <a:t>Consolidation and Review (Weeks 1-2)</a:t>
-            </a:r>
-          </a:p>
-        </p:txBody>
-      </p:sp>
-      <p:sp>
-        <p:nvSpPr>
-          <p:cNvPr id="6" name="TextBox 5"/>
-          <p:cNvSpPr txBox="1"/>
-          <p:nvPr/>
-        </p:nvSpPr>
-        <p:spPr>
-          <a:xfrm>
-            <a:off x="457200" y="2788920"/>
-            <a:ext cx="6949440" cy="365760"/>
-          </a:xfrm>
-          <a:prstGeom prst="rect">
-            <a:avLst/>
-          </a:prstGeom>
-          <a:noFill/>
-        </p:spPr>
-        <p:txBody>
-          <a:bodyPr wrap="square" anchor="t" lIns="0" rIns="0" tIns="0" bIns="0">
-            <a:spAutoFit/>
-          </a:bodyPr>
-          <a:lstStyle/>
-          <a:p>
-            <a:pPr algn="l">
-              <a:spcBef>
-                <a:spcPts val="0"/>
-              </a:spcBef>
-              <a:spcAft>
-                <a:spcPts val="800"/>
-              </a:spcAft>
-            </a:pPr>
-            <a:r>
-              <a:rPr sz="2000" b="1" i="0">
-                <a:solidFill>
-                  <a:srgbClr val="000000"/>
-                </a:solidFill>
-                <a:latin typeface="Arial"/>
-              </a:rPr>
-              <a:t>Learning Objectives</a:t>
-            </a:r>
-          </a:p>
-        </p:txBody>
-      </p:sp>
-      <p:sp>
-        <p:nvSpPr>
-          <p:cNvPr id="7" name="TextBox 6"/>
-          <p:cNvSpPr txBox="1"/>
-          <p:nvPr/>
-        </p:nvSpPr>
-        <p:spPr>
-          <a:xfrm>
-            <a:off x="457200" y="3246120"/>
-            <a:ext cx="6949440" cy="1645920"/>
-          </a:xfrm>
-          <a:prstGeom prst="rect">
-            <a:avLst/>
-          </a:prstGeom>
-          <a:noFill/>
-        </p:spPr>
-        <p:txBody>
-          <a:bodyPr wrap="square" anchor="t" lIns="0" rIns="0" tIns="0" bIns="0">
-            <a:spAutoFit/>
-          </a:bodyPr>
-          <a:lstStyle/>
-          <a:p>
-            <a:pPr algn="l">
-              <a:spcBef>
-                <a:spcPts val="0"/>
-              </a:spcBef>
-              <a:spcAft>
-                <a:spcPts val="1000"/>
-              </a:spcAft>
-            </a:pPr>
-            <a:r>
-              <a:rPr sz="2200" b="0" i="0">
-                <a:solidFill>
-                  <a:srgbClr val="000000"/>
-                </a:solidFill>
-                <a:latin typeface="Arial"/>
-              </a:rPr>
-              <a:t>-  Consolidate solving one-step and two-step equations</a:t>
-            </a:r>
-          </a:p>
-          <a:p>
-            <a:pPr algn="l">
-              <a:spcBef>
-                <a:spcPts val="0"/>
-              </a:spcBef>
-              <a:spcAft>
-                <a:spcPts val="1000"/>
-              </a:spcAft>
-            </a:pPr>
-            <a:r>
-              <a:rPr sz="2200" b="0" i="0">
-                <a:solidFill>
-                  <a:srgbClr val="000000"/>
-                </a:solidFill>
-                <a:latin typeface="Arial"/>
-              </a:rPr>
-              <a:t>-  Identify and correct common errors in worked solutions</a:t>
-            </a:r>
-          </a:p>
-          <a:p>
-            <a:pPr algn="l">
-              <a:spcBef>
-                <a:spcPts val="0"/>
-              </a:spcBef>
-              <a:spcAft>
-                <a:spcPts val="1000"/>
-              </a:spcAft>
-            </a:pPr>
-            <a:r>
-              <a:rPr sz="2200" b="0" i="0">
-                <a:solidFill>
-                  <a:srgbClr val="000000"/>
-                </a:solidFill>
-                <a:latin typeface="Arial"/>
-              </a:rPr>
-              <a:t>-  Build confidence and fluency ahead of the next stage (brackets)</a:t>
+              <a:t>-  Build fluency and speed across all percentage skills so far</a:t>
             </a:r>
           </a:p>
         </p:txBody>
@@ -4108,19 +3952,12 @@
           <a:noFill/>
         </p:spPr>
         <p:txBody>
-          <a:bodyPr wrap="square" anchor="t" lIns="0" rIns="0" tIns="0" bIns="0">
-            <a:spAutoFit/>
-          </a:bodyPr>
-          <a:lstStyle/>
-          <a:p>
-            <a:pPr algn="l">
-              <a:spcBef>
-                <a:spcPts val="0"/>
-              </a:spcBef>
-              <a:spcAft>
-                <a:spcPts val="800"/>
-              </a:spcAft>
-            </a:pPr>
+          <a:bodyPr wrap="square">
+            <a:spAutoFit/>
+          </a:bodyPr>
+          <a:lstStyle/>
+          <a:p>
+            <a:pPr algn="l"/>
             <a:r>
               <a:rPr sz="2000" b="1" i="0">
                 <a:solidFill>
@@ -4155,7 +3992,6 @@
               <a:srgbClr val="CCCCCC"/>
             </a:solidFill>
           </a:ln>
-          <a:effectLst/>
         </p:spPr>
         <p:style>
           <a:lnRef idx="1">
@@ -4172,18 +4008,18 @@
           </a:fontRef>
         </p:style>
         <p:txBody>
-          <a:bodyPr rtlCol="0" anchor="ctr" wrap="square" lIns="109728" rIns="109728" tIns="18288" bIns="18288"/>
+          <a:bodyPr rtlCol="0" anchor="ctr" wrap="square"/>
           <a:lstStyle/>
           <a:p>
             <a:pPr algn="ctr"/>
             <a:r>
-              <a:rPr sz="1500" b="1" i="0">
+              <a:rPr sz="1500" b="1">
                 <a:solidFill>
                   <a:srgbClr val="000000"/>
                 </a:solidFill>
                 <a:latin typeface="Arial"/>
               </a:rPr>
-              <a:t>Consolidation</a:t>
+              <a:t>Method</a:t>
             </a:r>
           </a:p>
         </p:txBody>
@@ -4196,7 +4032,7 @@
         </p:nvSpPr>
         <p:spPr>
           <a:xfrm>
-            <a:off x="8229600" y="3858768"/>
+            <a:off x="8229600" y="3758780"/>
             <a:ext cx="3291840" cy="438912"/>
           </a:xfrm>
           <a:prstGeom prst="roundRect">
@@ -4210,7 +4046,6 @@
               <a:srgbClr val="CCCCCC"/>
             </a:solidFill>
           </a:ln>
-          <a:effectLst/>
         </p:spPr>
         <p:style>
           <a:lnRef idx="1">
@@ -4227,18 +4062,18 @@
           </a:fontRef>
         </p:style>
         <p:txBody>
-          <a:bodyPr rtlCol="0" anchor="ctr" wrap="square" lIns="109728" rIns="109728" tIns="18288" bIns="18288"/>
+          <a:bodyPr rtlCol="0" anchor="ctr" wrap="square"/>
           <a:lstStyle/>
           <a:p>
             <a:pPr algn="ctr"/>
             <a:r>
-              <a:rPr sz="1500" b="1" i="0">
+              <a:rPr sz="1500" b="1">
                 <a:solidFill>
                   <a:srgbClr val="000000"/>
                 </a:solidFill>
                 <a:latin typeface="Arial"/>
               </a:rPr>
-              <a:t>Review</a:t>
+              <a:t>Fluency</a:t>
             </a:r>
           </a:p>
         </p:txBody>
@@ -4251,7 +4086,7 @@
         </p:nvSpPr>
         <p:spPr>
           <a:xfrm>
-            <a:off x="8229600" y="4425696"/>
+            <a:off x="8229600" y="4225720"/>
             <a:ext cx="3291840" cy="438912"/>
           </a:xfrm>
           <a:prstGeom prst="roundRect">
@@ -4265,7 +4100,6 @@
               <a:srgbClr val="CCCCCC"/>
             </a:solidFill>
           </a:ln>
-          <a:effectLst/>
         </p:spPr>
         <p:style>
           <a:lnRef idx="1">
@@ -4282,18 +4116,18 @@
           </a:fontRef>
         </p:style>
         <p:txBody>
-          <a:bodyPr rtlCol="0" anchor="ctr" wrap="square" lIns="109728" rIns="109728" tIns="18288" bIns="18288"/>
+          <a:bodyPr rtlCol="0" anchor="ctr" wrap="square"/>
           <a:lstStyle/>
           <a:p>
             <a:pPr algn="ctr"/>
             <a:r>
-              <a:rPr sz="1500" b="1" i="0">
+              <a:rPr sz="1500" b="1">
                 <a:solidFill>
                   <a:srgbClr val="000000"/>
                 </a:solidFill>
                 <a:latin typeface="Arial"/>
               </a:rPr>
-              <a:t>Common error</a:t>
+              <a:t>Review</a:t>
             </a:r>
           </a:p>
         </p:txBody>
@@ -4306,7 +4140,7 @@
         </p:nvSpPr>
         <p:spPr>
           <a:xfrm>
-            <a:off x="8229600" y="4992624"/>
+            <a:off x="8229600" y="4692660"/>
             <a:ext cx="3291840" cy="438912"/>
           </a:xfrm>
           <a:prstGeom prst="roundRect">
@@ -4320,7 +4154,6 @@
               <a:srgbClr val="CCCCCC"/>
             </a:solidFill>
           </a:ln>
-          <a:effectLst/>
         </p:spPr>
         <p:style>
           <a:lnRef idx="1">
@@ -4337,25 +4170,79 @@
           </a:fontRef>
         </p:style>
         <p:txBody>
-          <a:bodyPr rtlCol="0" anchor="ctr" wrap="square" lIns="109728" rIns="109728" tIns="18288" bIns="18288"/>
+          <a:bodyPr rtlCol="0" anchor="ctr" wrap="square"/>
           <a:lstStyle/>
           <a:p>
             <a:pPr algn="ctr"/>
             <a:r>
-              <a:rPr sz="1500" b="1" i="0">
+              <a:rPr sz="1500" b="1">
                 <a:solidFill>
                   <a:srgbClr val="000000"/>
                 </a:solidFill>
                 <a:latin typeface="Arial"/>
               </a:rPr>
-              <a:t>Fluency</a:t>
-            </a:r>
-          </a:p>
-        </p:txBody>
-      </p:sp>
-      <p:sp>
-        <p:nvSpPr>
-          <p:cNvPr id="13" name="TextBox 12"/>
+              <a:t>Mixed</a:t>
+            </a:r>
+          </a:p>
+        </p:txBody>
+      </p:sp>
+      <p:sp>
+        <p:nvSpPr>
+          <p:cNvPr id="13" name="Rounded Rectangle 12"/>
+          <p:cNvSpPr/>
+          <p:nvPr/>
+        </p:nvSpPr>
+        <p:spPr>
+          <a:xfrm>
+            <a:off x="8229600" y="5159600"/>
+            <a:ext cx="3291840" cy="438912"/>
+          </a:xfrm>
+          <a:prstGeom prst="roundRect">
+            <a:avLst/>
+          </a:prstGeom>
+          <a:solidFill>
+            <a:srgbClr val="F2F2F2"/>
+          </a:solidFill>
+          <a:ln w="9525">
+            <a:solidFill>
+              <a:srgbClr val="CCCCCC"/>
+            </a:solidFill>
+          </a:ln>
+        </p:spPr>
+        <p:style>
+          <a:lnRef idx="1">
+            <a:schemeClr val="accent1"/>
+          </a:lnRef>
+          <a:fillRef idx="3">
+            <a:schemeClr val="accent1"/>
+          </a:fillRef>
+          <a:effectRef idx="2">
+            <a:schemeClr val="accent1"/>
+          </a:effectRef>
+          <a:fontRef idx="minor">
+            <a:schemeClr val="lt1"/>
+          </a:fontRef>
+        </p:style>
+        <p:txBody>
+          <a:bodyPr rtlCol="0" anchor="ctr" wrap="square"/>
+          <a:lstStyle/>
+          <a:p>
+            <a:pPr algn="ctr"/>
+            <a:r>
+              <a:rPr sz="1500" b="1">
+                <a:solidFill>
+                  <a:srgbClr val="000000"/>
+                </a:solidFill>
+                <a:latin typeface="Arial"/>
+              </a:rPr>
+              <a:t>Strategy</a:t>
+            </a:r>
+          </a:p>
+        </p:txBody>
+      </p:sp>
+      <p:sp>
+        <p:nvSpPr>
+          <p:cNvPr id="14" name="TextBox 13"/>
           <p:cNvSpPr txBox="1"/>
           <p:nvPr/>
         </p:nvSpPr>
@@ -4370,19 +4257,12 @@
           <a:noFill/>
         </p:spPr>
         <p:txBody>
-          <a:bodyPr wrap="square" anchor="t" lIns="0" rIns="0" tIns="0" bIns="0">
-            <a:spAutoFit/>
-          </a:bodyPr>
-          <a:lstStyle/>
-          <a:p>
-            <a:pPr algn="l">
-              <a:spcBef>
-                <a:spcPts val="0"/>
-              </a:spcBef>
-              <a:spcAft>
-                <a:spcPts val="800"/>
-              </a:spcAft>
-            </a:pPr>
+          <a:bodyPr wrap="square">
+            <a:spAutoFit/>
+          </a:bodyPr>
+          <a:lstStyle/>
+          <a:p>
+            <a:pPr algn="l"/>
             <a:r>
               <a:rPr sz="1100" b="0" i="0">
                 <a:solidFill>
@@ -4390,7 +4270,7 @@
                 </a:solidFill>
                 <a:latin typeface="Arial"/>
               </a:rPr>
-              <a:t>Y8 Solving Linear Equations — Lower-to-Middle Set</a:t>
+              <a:t>Y8 Percentages and Proportionality — Middle Set</a:t>
             </a:r>
           </a:p>
         </p:txBody>
@@ -4438,19 +4318,12 @@
           <a:noFill/>
         </p:spPr>
         <p:txBody>
-          <a:bodyPr wrap="square" anchor="t" lIns="0" rIns="0" tIns="0" bIns="0">
-            <a:spAutoFit/>
-          </a:bodyPr>
-          <a:lstStyle/>
-          <a:p>
-            <a:pPr algn="l">
-              <a:spcBef>
-                <a:spcPts val="0"/>
-              </a:spcBef>
-              <a:spcAft>
-                <a:spcPts val="800"/>
-              </a:spcAft>
-            </a:pPr>
+          <a:bodyPr wrap="square">
+            <a:spAutoFit/>
+          </a:bodyPr>
+          <a:lstStyle/>
+          <a:p>
+            <a:pPr algn="l"/>
             <a:r>
               <a:rPr sz="1500" b="1" i="0">
                 <a:solidFill>
@@ -4480,19 +4353,12 @@
           <a:noFill/>
         </p:spPr>
         <p:txBody>
-          <a:bodyPr wrap="square" anchor="t" lIns="0" rIns="0" tIns="0" bIns="0">
-            <a:spAutoFit/>
-          </a:bodyPr>
-          <a:lstStyle/>
-          <a:p>
-            <a:pPr algn="r">
-              <a:spcBef>
-                <a:spcPts val="0"/>
-              </a:spcBef>
-              <a:spcAft>
-                <a:spcPts val="800"/>
-              </a:spcAft>
-            </a:pPr>
+          <a:bodyPr wrap="square">
+            <a:spAutoFit/>
+          </a:bodyPr>
+          <a:lstStyle/>
+          <a:p>
+            <a:pPr algn="r"/>
             <a:r>
               <a:rPr sz="1300" b="0" i="0">
                 <a:solidFill>
@@ -4522,169 +4388,114 @@
           <a:noFill/>
         </p:spPr>
         <p:txBody>
-          <a:bodyPr wrap="square" anchor="t" lIns="0" rIns="0" tIns="0" bIns="0">
+          <a:bodyPr wrap="square">
+            <a:spAutoFit/>
+          </a:bodyPr>
+          <a:lstStyle/>
+          <a:p>
+            <a:pPr algn="l"/>
+            <a:r>
+              <a:rPr sz="3400" b="1" i="0">
+                <a:solidFill>
+                  <a:srgbClr val="000000"/>
+                </a:solidFill>
+                <a:latin typeface="Arial"/>
+              </a:rPr>
+              <a:t>Choosing the Right Method</a:t>
+            </a:r>
+          </a:p>
+        </p:txBody>
+      </p:sp>
+      <p:sp>
+        <p:nvSpPr>
+          <p:cNvPr id="5" name="TextBox 4"/>
+          <p:cNvSpPr txBox="1"/>
+          <p:nvPr/>
+        </p:nvSpPr>
+        <p:spPr>
+          <a:xfrm>
+            <a:off x="457200" y="1600000"/>
+            <a:ext cx="11277295" cy="3600000"/>
+          </a:xfrm>
+          <a:prstGeom prst="rect">
+            <a:avLst/>
+          </a:prstGeom>
+          <a:noFill/>
+        </p:spPr>
+        <p:txBody>
+          <a:bodyPr wrap="square">
             <a:spAutoFit/>
           </a:bodyPr>
           <a:lstStyle/>
           <a:p>
             <a:pPr algn="l">
-              <a:spcBef>
-                <a:spcPts val="0"/>
-              </a:spcBef>
-              <a:spcAft>
-                <a:spcPts val="800"/>
-              </a:spcAft>
-            </a:pPr>
-            <a:r>
-              <a:rPr sz="3400" b="1" i="0">
-                <a:solidFill>
-                  <a:srgbClr val="000000"/>
-                </a:solidFill>
-                <a:latin typeface="Arial"/>
-              </a:rPr>
-              <a:t>Find the Mistake</a:t>
-            </a:r>
-          </a:p>
-        </p:txBody>
-      </p:sp>
-      <p:sp>
-        <p:nvSpPr>
-          <p:cNvPr id="5" name="TextBox 4"/>
-          <p:cNvSpPr txBox="1"/>
-          <p:nvPr/>
-        </p:nvSpPr>
-        <p:spPr>
-          <a:xfrm>
-            <a:off x="457200" y="1691640"/>
-            <a:ext cx="11277295" cy="2377440"/>
-          </a:xfrm>
-          <a:prstGeom prst="rect">
-            <a:avLst/>
-          </a:prstGeom>
-          <a:noFill/>
-        </p:spPr>
-        <p:txBody>
-          <a:bodyPr wrap="square" anchor="t" lIns="0" rIns="0" tIns="0" bIns="0">
-            <a:spAutoFit/>
-          </a:bodyPr>
-          <a:lstStyle/>
-          <a:p>
-            <a:pPr algn="l">
-              <a:spcBef>
-                <a:spcPts val="0"/>
-              </a:spcBef>
               <a:spcAft>
                 <a:spcPts val="1400"/>
               </a:spcAft>
             </a:pPr>
             <a:r>
-              <a:rPr sz="2200" b="0" i="0">
+              <a:rPr sz="2200" b="0">
                 <a:solidFill>
                   <a:srgbClr val="000000"/>
                 </a:solidFill>
                 <a:latin typeface="Arial"/>
               </a:rPr>
-              <a:t>Everyone makes mistakes when learning something new — even in maths! The key is learning to spot and fix them.</a:t>
+              <a:t>Over the last two weeks you've learned four related skills: finding a percentage, increasing/decreasing, using multipliers, and reversing percentages.</a:t>
             </a:r>
           </a:p>
           <a:p>
             <a:pPr algn="l">
-              <a:spcBef>
-                <a:spcPts val="0"/>
-              </a:spcBef>
               <a:spcAft>
                 <a:spcPts val="1400"/>
               </a:spcAft>
             </a:pPr>
             <a:r>
-              <a:rPr sz="2200" b="0" i="0">
+              <a:rPr sz="2200" b="0">
                 <a:solidFill>
                   <a:srgbClr val="000000"/>
                 </a:solidFill>
                 <a:latin typeface="Arial"/>
               </a:rPr>
-              <a:t>Today we'll look at some worked solutions that contain a mistake, and correct them.</a:t>
+              <a:t>The hardest part is often deciding which method a question needs — not doing the calculation.</a:t>
             </a:r>
           </a:p>
           <a:p>
             <a:pPr algn="l">
-              <a:spcBef>
-                <a:spcPts val="0"/>
-              </a:spcBef>
               <a:spcAft>
                 <a:spcPts val="1400"/>
               </a:spcAft>
             </a:pPr>
             <a:r>
-              <a:rPr sz="2200" b="0" i="0">
+              <a:rPr sz="2200" b="0">
                 <a:solidFill>
                   <a:srgbClr val="000000"/>
                 </a:solidFill>
                 <a:latin typeface="Arial"/>
               </a:rPr>
-              <a:t>This will help us avoid making the same mistakes ourselves.</a:t>
-            </a:r>
-          </a:p>
-        </p:txBody>
-      </p:sp>
-      <p:sp>
-        <p:nvSpPr>
-          <p:cNvPr id="6" name="Rounded Rectangle 5"/>
-          <p:cNvSpPr/>
-          <p:nvPr/>
-        </p:nvSpPr>
-        <p:spPr>
-          <a:xfrm>
-            <a:off x="457200" y="4297680"/>
-            <a:ext cx="11277295" cy="1371600"/>
-          </a:xfrm>
-          <a:prstGeom prst="roundRect">
-            <a:avLst/>
-          </a:prstGeom>
-          <a:solidFill>
-            <a:srgbClr val="F2F2F2"/>
-          </a:solidFill>
-          <a:ln w="9525">
-            <a:solidFill>
-              <a:srgbClr val="CCCCCC"/>
-            </a:solidFill>
-          </a:ln>
-          <a:effectLst/>
-        </p:spPr>
-        <p:style>
-          <a:lnRef idx="1">
-            <a:schemeClr val="accent1"/>
-          </a:lnRef>
-          <a:fillRef idx="3">
-            <a:schemeClr val="accent1"/>
-          </a:fillRef>
-          <a:effectRef idx="2">
-            <a:schemeClr val="accent1"/>
-          </a:effectRef>
-          <a:fontRef idx="minor">
-            <a:schemeClr val="lt1"/>
-          </a:fontRef>
-        </p:style>
-        <p:txBody>
-          <a:bodyPr rtlCol="0" anchor="ctr" wrap="square" lIns="274320" rIns="274320"/>
-          <a:lstStyle/>
-          <a:p>
-            <a:pPr algn="l"/>
-            <a:r>
-              <a:rPr sz="2200" b="1" i="0">
+              <a:t>Look for clues: 'find X% of' needs a straight calculation; 'the price is now' after a change usually needs reversing.</a:t>
+            </a:r>
+          </a:p>
+          <a:p>
+            <a:pPr algn="l">
+              <a:spcAft>
+                <a:spcPts val="1400"/>
+              </a:spcAft>
+            </a:pPr>
+            <a:r>
+              <a:rPr sz="2200" b="1">
                 <a:solidFill>
                   <a:srgbClr val="000000"/>
                 </a:solidFill>
                 <a:latin typeface="Arial"/>
               </a:rPr>
-              <a:t>Think, pair, share: Look at this 'solution': 2x + 4 = 10 → 2x = 14 → x = 7. What went wrong?</a:t>
-            </a:r>
-          </a:p>
-        </p:txBody>
-      </p:sp>
-      <p:sp>
-        <p:nvSpPr>
-          <p:cNvPr id="7" name="TextBox 6"/>
+              <a:t>Think, pair, share: How can you tell whether a question wants you to find a percentage of an amount, or work backwards to an original amount?</a:t>
+            </a:r>
+          </a:p>
+        </p:txBody>
+      </p:sp>
+      <p:sp>
+        <p:nvSpPr>
+          <p:cNvPr id="6" name="TextBox 5"/>
           <p:cNvSpPr txBox="1"/>
           <p:nvPr/>
         </p:nvSpPr>
@@ -4699,19 +4510,12 @@
           <a:noFill/>
         </p:spPr>
         <p:txBody>
-          <a:bodyPr wrap="square" anchor="t" lIns="0" rIns="0" tIns="0" bIns="0">
-            <a:spAutoFit/>
-          </a:bodyPr>
-          <a:lstStyle/>
-          <a:p>
-            <a:pPr algn="l">
-              <a:spcBef>
-                <a:spcPts val="0"/>
-              </a:spcBef>
-              <a:spcAft>
-                <a:spcPts val="800"/>
-              </a:spcAft>
-            </a:pPr>
+          <a:bodyPr wrap="square">
+            <a:spAutoFit/>
+          </a:bodyPr>
+          <a:lstStyle/>
+          <a:p>
+            <a:pPr algn="l"/>
             <a:r>
               <a:rPr sz="1100" b="0" i="0">
                 <a:solidFill>
@@ -4719,7 +4523,7 @@
                 </a:solidFill>
                 <a:latin typeface="Arial"/>
               </a:rPr>
-              <a:t>Y8 Solving Linear Equations — Lower-to-Middle Set</a:t>
+              <a:t>Y8 Percentages and Proportionality — Middle Set</a:t>
             </a:r>
           </a:p>
         </p:txBody>
@@ -4767,252 +4571,196 @@
           <a:noFill/>
         </p:spPr>
         <p:txBody>
-          <a:bodyPr wrap="square" anchor="t" lIns="0" rIns="0" tIns="0" bIns="0">
+          <a:bodyPr wrap="square">
+            <a:spAutoFit/>
+          </a:bodyPr>
+          <a:lstStyle/>
+          <a:p>
+            <a:pPr algn="l"/>
+            <a:r>
+              <a:rPr sz="1500" b="1" i="0">
+                <a:solidFill>
+                  <a:srgbClr val="595959"/>
+                </a:solidFill>
+                <a:latin typeface="Arial"/>
+              </a:rPr>
+              <a:t>MODELLING: I DO</a:t>
+            </a:r>
+          </a:p>
+        </p:txBody>
+      </p:sp>
+      <p:sp>
+        <p:nvSpPr>
+          <p:cNvPr id="3" name="TextBox 2"/>
+          <p:cNvSpPr txBox="1"/>
+          <p:nvPr/>
+        </p:nvSpPr>
+        <p:spPr>
+          <a:xfrm>
+            <a:off x="7619695" y="256032"/>
+            <a:ext cx="4114800" cy="365760"/>
+          </a:xfrm>
+          <a:prstGeom prst="rect">
+            <a:avLst/>
+          </a:prstGeom>
+          <a:noFill/>
+        </p:spPr>
+        <p:txBody>
+          <a:bodyPr wrap="square">
+            <a:spAutoFit/>
+          </a:bodyPr>
+          <a:lstStyle/>
+          <a:p>
+            <a:pPr algn="r"/>
+            <a:r>
+              <a:rPr sz="1300" b="0" i="0">
+                <a:solidFill>
+                  <a:srgbClr val="595959"/>
+                </a:solidFill>
+                <a:latin typeface="Arial"/>
+              </a:rPr>
+              <a:t>L8</a:t>
+            </a:r>
+          </a:p>
+        </p:txBody>
+      </p:sp>
+      <p:sp>
+        <p:nvSpPr>
+          <p:cNvPr id="4" name="TextBox 3"/>
+          <p:cNvSpPr txBox="1"/>
+          <p:nvPr/>
+        </p:nvSpPr>
+        <p:spPr>
+          <a:xfrm>
+            <a:off x="457200" y="777240"/>
+            <a:ext cx="11277295" cy="640080"/>
+          </a:xfrm>
+          <a:prstGeom prst="rect">
+            <a:avLst/>
+          </a:prstGeom>
+          <a:noFill/>
+        </p:spPr>
+        <p:txBody>
+          <a:bodyPr wrap="square">
+            <a:spAutoFit/>
+          </a:bodyPr>
+          <a:lstStyle/>
+          <a:p>
+            <a:pPr algn="l"/>
+            <a:r>
+              <a:rPr sz="3400" b="1" i="0">
+                <a:solidFill>
+                  <a:srgbClr val="000000"/>
+                </a:solidFill>
+                <a:latin typeface="Arial"/>
+              </a:rPr>
+              <a:t>I Do — Teacher Models</a:t>
+            </a:r>
+          </a:p>
+        </p:txBody>
+      </p:sp>
+      <p:sp>
+        <p:nvSpPr>
+          <p:cNvPr id="5" name="TextBox 4"/>
+          <p:cNvSpPr txBox="1"/>
+          <p:nvPr/>
+        </p:nvSpPr>
+        <p:spPr>
+          <a:xfrm>
+            <a:off x="457200" y="1600000"/>
+            <a:ext cx="11277295" cy="822960"/>
+          </a:xfrm>
+          <a:prstGeom prst="rect">
+            <a:avLst/>
+          </a:prstGeom>
+          <a:noFill/>
+        </p:spPr>
+        <p:txBody>
+          <a:bodyPr wrap="square">
+            <a:spAutoFit/>
+          </a:bodyPr>
+          <a:lstStyle/>
+          <a:p>
+            <a:pPr algn="l"/>
+            <a:r>
+              <a:rPr sz="2400" b="1" i="0">
+                <a:solidFill>
+                  <a:srgbClr val="000000"/>
+                </a:solidFill>
+                <a:latin typeface="Arial"/>
+              </a:rPr>
+              <a:t>A games console costs £250. It is reduced by 12% in a sale, then VAT of 20% is added to the new price. Find the final price.</a:t>
+            </a:r>
+          </a:p>
+        </p:txBody>
+      </p:sp>
+      <p:sp>
+        <p:nvSpPr>
+          <p:cNvPr id="6" name="TextBox 5"/>
+          <p:cNvSpPr txBox="1"/>
+          <p:nvPr/>
+        </p:nvSpPr>
+        <p:spPr>
+          <a:xfrm>
+            <a:off x="457200" y="2602960"/>
+            <a:ext cx="11277295" cy="3843560"/>
+          </a:xfrm>
+          <a:prstGeom prst="rect">
+            <a:avLst/>
+          </a:prstGeom>
+          <a:noFill/>
+        </p:spPr>
+        <p:txBody>
+          <a:bodyPr wrap="square">
             <a:spAutoFit/>
           </a:bodyPr>
           <a:lstStyle/>
           <a:p>
             <a:pPr algn="l">
-              <a:spcBef>
-                <a:spcPts val="0"/>
-              </a:spcBef>
               <a:spcAft>
-                <a:spcPts val="800"/>
+                <a:spcPts val="1400"/>
               </a:spcAft>
             </a:pPr>
             <a:r>
-              <a:rPr sz="1500" b="1" i="0">
-                <a:solidFill>
-                  <a:srgbClr val="595959"/>
-                </a:solidFill>
-                <a:latin typeface="Arial"/>
-              </a:rPr>
-              <a:t>MODELLING: I DO</a:t>
-            </a:r>
-          </a:p>
-        </p:txBody>
-      </p:sp>
-      <p:sp>
-        <p:nvSpPr>
-          <p:cNvPr id="3" name="TextBox 2"/>
-          <p:cNvSpPr txBox="1"/>
-          <p:nvPr/>
-        </p:nvSpPr>
-        <p:spPr>
-          <a:xfrm>
-            <a:off x="7619695" y="256032"/>
-            <a:ext cx="4114800" cy="365760"/>
-          </a:xfrm>
-          <a:prstGeom prst="rect">
-            <a:avLst/>
-          </a:prstGeom>
-          <a:noFill/>
-        </p:spPr>
-        <p:txBody>
-          <a:bodyPr wrap="square" anchor="t" lIns="0" rIns="0" tIns="0" bIns="0">
-            <a:spAutoFit/>
-          </a:bodyPr>
-          <a:lstStyle/>
-          <a:p>
-            <a:pPr algn="r">
-              <a:spcBef>
-                <a:spcPts val="0"/>
-              </a:spcBef>
+              <a:rPr sz="2100" b="0">
+                <a:solidFill>
+                  <a:srgbClr val="000000"/>
+                </a:solidFill>
+                <a:latin typeface="Arial"/>
+              </a:rPr>
+              <a:t>-  Reduce by 12%: 250 × 0.88 = 220</a:t>
+            </a:r>
+          </a:p>
+          <a:p>
+            <a:pPr algn="l">
               <a:spcAft>
-                <a:spcPts val="800"/>
+                <a:spcPts val="1400"/>
               </a:spcAft>
             </a:pPr>
             <a:r>
-              <a:rPr sz="1300" b="0" i="0">
-                <a:solidFill>
-                  <a:srgbClr val="595959"/>
-                </a:solidFill>
-                <a:latin typeface="Arial"/>
-              </a:rPr>
-              <a:t>L8</a:t>
-            </a:r>
-          </a:p>
-        </p:txBody>
-      </p:sp>
-      <p:sp>
-        <p:nvSpPr>
-          <p:cNvPr id="4" name="TextBox 3"/>
-          <p:cNvSpPr txBox="1"/>
-          <p:nvPr/>
-        </p:nvSpPr>
-        <p:spPr>
-          <a:xfrm>
-            <a:off x="457200" y="777240"/>
-            <a:ext cx="11277295" cy="640080"/>
-          </a:xfrm>
-          <a:prstGeom prst="rect">
-            <a:avLst/>
-          </a:prstGeom>
-          <a:noFill/>
-        </p:spPr>
-        <p:txBody>
-          <a:bodyPr wrap="square" anchor="t" lIns="0" rIns="0" tIns="0" bIns="0">
-            <a:spAutoFit/>
-          </a:bodyPr>
-          <a:lstStyle/>
+              <a:rPr sz="2100" b="0">
+                <a:solidFill>
+                  <a:srgbClr val="000000"/>
+                </a:solidFill>
+                <a:latin typeface="Arial"/>
+              </a:rPr>
+              <a:t>-  Add 20% VAT to the new price: 220 × 1.2 = 264</a:t>
+            </a:r>
+          </a:p>
           <a:p>
             <a:pPr algn="l">
-              <a:spcBef>
-                <a:spcPts val="0"/>
-              </a:spcBef>
               <a:spcAft>
-                <a:spcPts val="800"/>
+                <a:spcPts val="1400"/>
               </a:spcAft>
             </a:pPr>
             <a:r>
-              <a:rPr sz="3400" b="1" i="0">
+              <a:rPr sz="2100" b="0">
                 <a:solidFill>
                   <a:srgbClr val="000000"/>
                 </a:solidFill>
                 <a:latin typeface="Arial"/>
               </a:rPr>
-              <a:t>I Do — Teacher Models</a:t>
-            </a:r>
-          </a:p>
-        </p:txBody>
-      </p:sp>
-      <p:sp>
-        <p:nvSpPr>
-          <p:cNvPr id="5" name="TextBox 4"/>
-          <p:cNvSpPr txBox="1"/>
-          <p:nvPr/>
-        </p:nvSpPr>
-        <p:spPr>
-          <a:xfrm>
-            <a:off x="457200" y="1508760"/>
-            <a:ext cx="11277295" cy="960120"/>
-          </a:xfrm>
-          <a:prstGeom prst="rect">
-            <a:avLst/>
-          </a:prstGeom>
-          <a:noFill/>
-        </p:spPr>
-        <p:txBody>
-          <a:bodyPr wrap="square" anchor="t" lIns="0" rIns="0" tIns="0" bIns="0">
-            <a:spAutoFit/>
-          </a:bodyPr>
-          <a:lstStyle/>
-          <a:p>
-            <a:pPr algn="l">
-              <a:spcBef>
-                <a:spcPts val="0"/>
-              </a:spcBef>
-              <a:spcAft>
-                <a:spcPts val="0"/>
-              </a:spcAft>
-            </a:pPr>
-            <a:r>
-              <a:rPr sz="2400" b="1" i="0">
-                <a:solidFill>
-                  <a:srgbClr val="000000"/>
-                </a:solidFill>
-                <a:latin typeface="Arial"/>
-              </a:rPr>
-              <a:t>Find and fix the mistake: 3x − 5 = 10 → 3x = 5 → x = 1.67</a:t>
-            </a:r>
-          </a:p>
-        </p:txBody>
-      </p:sp>
-      <p:sp>
-        <p:nvSpPr>
-          <p:cNvPr id="6" name="TextBox 5"/>
-          <p:cNvSpPr txBox="1"/>
-          <p:nvPr/>
-        </p:nvSpPr>
-        <p:spPr>
-          <a:xfrm>
-            <a:off x="457200" y="2606040"/>
-            <a:ext cx="11277295" cy="3657600"/>
-          </a:xfrm>
-          <a:prstGeom prst="rect">
-            <a:avLst/>
-          </a:prstGeom>
-          <a:noFill/>
-        </p:spPr>
-        <p:txBody>
-          <a:bodyPr wrap="square" anchor="t" lIns="0" rIns="0" tIns="0" bIns="0">
-            <a:spAutoFit/>
-          </a:bodyPr>
-          <a:lstStyle/>
-          <a:p>
-            <a:pPr algn="l">
-              <a:spcBef>
-                <a:spcPts val="0"/>
-              </a:spcBef>
-              <a:spcAft>
-                <a:spcPts val="1200"/>
-              </a:spcAft>
-            </a:pPr>
-            <a:r>
-              <a:rPr sz="2100" b="0" i="0">
-                <a:solidFill>
-                  <a:srgbClr val="000000"/>
-                </a:solidFill>
-                <a:latin typeface="Arial"/>
-              </a:rPr>
-              <a:t>-  Check the first step: −5 becomes +5 when moved, so 3x = 10 + 5 = 15, not 5. That's the mistake.</a:t>
-            </a:r>
-          </a:p>
-          <a:p>
-            <a:pPr algn="l">
-              <a:spcBef>
-                <a:spcPts val="0"/>
-              </a:spcBef>
-              <a:spcAft>
-                <a:spcPts val="1200"/>
-              </a:spcAft>
-            </a:pPr>
-            <a:r>
-              <a:rPr sz="2100" b="0" i="0">
-                <a:solidFill>
-                  <a:srgbClr val="000000"/>
-                </a:solidFill>
-                <a:latin typeface="Arial"/>
-              </a:rPr>
-              <a:t>-  Corrected: 3x = 15</a:t>
-            </a:r>
-          </a:p>
-          <a:p>
-            <a:pPr algn="l">
-              <a:spcBef>
-                <a:spcPts val="0"/>
-              </a:spcBef>
-              <a:spcAft>
-                <a:spcPts val="1200"/>
-              </a:spcAft>
-            </a:pPr>
-            <a:r>
-              <a:rPr sz="2100" b="0" i="0">
-                <a:solidFill>
-                  <a:srgbClr val="000000"/>
-                </a:solidFill>
-                <a:latin typeface="Arial"/>
-              </a:rPr>
-              <a:t>-  Divide both sides by 3: x = 5</a:t>
-            </a:r>
-          </a:p>
-          <a:p>
-            <a:pPr algn="l">
-              <a:spcBef>
-                <a:spcPts val="0"/>
-              </a:spcBef>
-              <a:spcAft>
-                <a:spcPts val="1200"/>
-              </a:spcAft>
-            </a:pPr>
-            <a:r>
-              <a:rPr sz="2100" b="0" i="0">
-                <a:solidFill>
-                  <a:srgbClr val="000000"/>
-                </a:solidFill>
-                <a:latin typeface="Arial"/>
-              </a:rPr>
-              <a:t>-  Check: 3 × 5 − 5 = 15 − 5 = 10 ✓</a:t>
+              <a:t>-  The final price is £264</a:t>
             </a:r>
           </a:p>
         </p:txBody>
@@ -5034,19 +4782,12 @@
           <a:noFill/>
         </p:spPr>
         <p:txBody>
-          <a:bodyPr wrap="square" anchor="t" lIns="0" rIns="0" tIns="0" bIns="0">
-            <a:spAutoFit/>
-          </a:bodyPr>
-          <a:lstStyle/>
-          <a:p>
-            <a:pPr algn="l">
-              <a:spcBef>
-                <a:spcPts val="0"/>
-              </a:spcBef>
-              <a:spcAft>
-                <a:spcPts val="800"/>
-              </a:spcAft>
-            </a:pPr>
+          <a:bodyPr wrap="square">
+            <a:spAutoFit/>
+          </a:bodyPr>
+          <a:lstStyle/>
+          <a:p>
+            <a:pPr algn="l"/>
             <a:r>
               <a:rPr sz="1100" b="0" i="0">
                 <a:solidFill>
@@ -5054,7 +4795,7 @@
                 </a:solidFill>
                 <a:latin typeface="Arial"/>
               </a:rPr>
-              <a:t>Y8 Solving Linear Equations — Lower-to-Middle Set</a:t>
+              <a:t>Y8 Percentages and Proportionality — Middle Set</a:t>
             </a:r>
           </a:p>
         </p:txBody>
@@ -5102,252 +4843,196 @@
           <a:noFill/>
         </p:spPr>
         <p:txBody>
-          <a:bodyPr wrap="square" anchor="t" lIns="0" rIns="0" tIns="0" bIns="0">
+          <a:bodyPr wrap="square">
+            <a:spAutoFit/>
+          </a:bodyPr>
+          <a:lstStyle/>
+          <a:p>
+            <a:pPr algn="l"/>
+            <a:r>
+              <a:rPr sz="1500" b="1" i="0">
+                <a:solidFill>
+                  <a:srgbClr val="595959"/>
+                </a:solidFill>
+                <a:latin typeface="Arial"/>
+              </a:rPr>
+              <a:t>MODELLING: WE DO</a:t>
+            </a:r>
+          </a:p>
+        </p:txBody>
+      </p:sp>
+      <p:sp>
+        <p:nvSpPr>
+          <p:cNvPr id="3" name="TextBox 2"/>
+          <p:cNvSpPr txBox="1"/>
+          <p:nvPr/>
+        </p:nvSpPr>
+        <p:spPr>
+          <a:xfrm>
+            <a:off x="7619695" y="256032"/>
+            <a:ext cx="4114800" cy="365760"/>
+          </a:xfrm>
+          <a:prstGeom prst="rect">
+            <a:avLst/>
+          </a:prstGeom>
+          <a:noFill/>
+        </p:spPr>
+        <p:txBody>
+          <a:bodyPr wrap="square">
+            <a:spAutoFit/>
+          </a:bodyPr>
+          <a:lstStyle/>
+          <a:p>
+            <a:pPr algn="r"/>
+            <a:r>
+              <a:rPr sz="1300" b="0" i="0">
+                <a:solidFill>
+                  <a:srgbClr val="595959"/>
+                </a:solidFill>
+                <a:latin typeface="Arial"/>
+              </a:rPr>
+              <a:t>L8</a:t>
+            </a:r>
+          </a:p>
+        </p:txBody>
+      </p:sp>
+      <p:sp>
+        <p:nvSpPr>
+          <p:cNvPr id="4" name="TextBox 3"/>
+          <p:cNvSpPr txBox="1"/>
+          <p:nvPr/>
+        </p:nvSpPr>
+        <p:spPr>
+          <a:xfrm>
+            <a:off x="457200" y="777240"/>
+            <a:ext cx="11277295" cy="640080"/>
+          </a:xfrm>
+          <a:prstGeom prst="rect">
+            <a:avLst/>
+          </a:prstGeom>
+          <a:noFill/>
+        </p:spPr>
+        <p:txBody>
+          <a:bodyPr wrap="square">
+            <a:spAutoFit/>
+          </a:bodyPr>
+          <a:lstStyle/>
+          <a:p>
+            <a:pPr algn="l"/>
+            <a:r>
+              <a:rPr sz="3400" b="1" i="0">
+                <a:solidFill>
+                  <a:srgbClr val="000000"/>
+                </a:solidFill>
+                <a:latin typeface="Arial"/>
+              </a:rPr>
+              <a:t>We Do — Guided Practice</a:t>
+            </a:r>
+          </a:p>
+        </p:txBody>
+      </p:sp>
+      <p:sp>
+        <p:nvSpPr>
+          <p:cNvPr id="5" name="TextBox 4"/>
+          <p:cNvSpPr txBox="1"/>
+          <p:nvPr/>
+        </p:nvSpPr>
+        <p:spPr>
+          <a:xfrm>
+            <a:off x="457200" y="1600000"/>
+            <a:ext cx="11277295" cy="822960"/>
+          </a:xfrm>
+          <a:prstGeom prst="rect">
+            <a:avLst/>
+          </a:prstGeom>
+          <a:noFill/>
+        </p:spPr>
+        <p:txBody>
+          <a:bodyPr wrap="square">
+            <a:spAutoFit/>
+          </a:bodyPr>
+          <a:lstStyle/>
+          <a:p>
+            <a:pPr algn="l"/>
+            <a:r>
+              <a:rPr sz="2400" b="1" i="0">
+                <a:solidFill>
+                  <a:srgbClr val="000000"/>
+                </a:solidFill>
+                <a:latin typeface="Arial"/>
+              </a:rPr>
+              <a:t>A salary of £32,000 rises by 4%, then falls by 4% the next year. Is the salary back to £32,000?</a:t>
+            </a:r>
+          </a:p>
+        </p:txBody>
+      </p:sp>
+      <p:sp>
+        <p:nvSpPr>
+          <p:cNvPr id="6" name="TextBox 5"/>
+          <p:cNvSpPr txBox="1"/>
+          <p:nvPr/>
+        </p:nvSpPr>
+        <p:spPr>
+          <a:xfrm>
+            <a:off x="457200" y="2602960"/>
+            <a:ext cx="11277295" cy="3843560"/>
+          </a:xfrm>
+          <a:prstGeom prst="rect">
+            <a:avLst/>
+          </a:prstGeom>
+          <a:noFill/>
+        </p:spPr>
+        <p:txBody>
+          <a:bodyPr wrap="square">
             <a:spAutoFit/>
           </a:bodyPr>
           <a:lstStyle/>
           <a:p>
             <a:pPr algn="l">
-              <a:spcBef>
-                <a:spcPts val="0"/>
-              </a:spcBef>
               <a:spcAft>
-                <a:spcPts val="800"/>
+                <a:spcPts val="1400"/>
               </a:spcAft>
             </a:pPr>
             <a:r>
-              <a:rPr sz="1500" b="1" i="0">
-                <a:solidFill>
-                  <a:srgbClr val="595959"/>
-                </a:solidFill>
-                <a:latin typeface="Arial"/>
-              </a:rPr>
-              <a:t>MODELLING: WE DO</a:t>
-            </a:r>
-          </a:p>
-        </p:txBody>
-      </p:sp>
-      <p:sp>
-        <p:nvSpPr>
-          <p:cNvPr id="3" name="TextBox 2"/>
-          <p:cNvSpPr txBox="1"/>
-          <p:nvPr/>
-        </p:nvSpPr>
-        <p:spPr>
-          <a:xfrm>
-            <a:off x="7619695" y="256032"/>
-            <a:ext cx="4114800" cy="365760"/>
-          </a:xfrm>
-          <a:prstGeom prst="rect">
-            <a:avLst/>
-          </a:prstGeom>
-          <a:noFill/>
-        </p:spPr>
-        <p:txBody>
-          <a:bodyPr wrap="square" anchor="t" lIns="0" rIns="0" tIns="0" bIns="0">
-            <a:spAutoFit/>
-          </a:bodyPr>
-          <a:lstStyle/>
-          <a:p>
-            <a:pPr algn="r">
-              <a:spcBef>
-                <a:spcPts val="0"/>
-              </a:spcBef>
+              <a:rPr sz="2100" b="0">
+                <a:solidFill>
+                  <a:srgbClr val="000000"/>
+                </a:solidFill>
+                <a:latin typeface="Arial"/>
+              </a:rPr>
+              <a:t>-  After the rise: 32,000 × 1.04 = 33,280</a:t>
+            </a:r>
+          </a:p>
+          <a:p>
+            <a:pPr algn="l">
               <a:spcAft>
-                <a:spcPts val="800"/>
+                <a:spcPts val="1400"/>
               </a:spcAft>
             </a:pPr>
             <a:r>
-              <a:rPr sz="1300" b="0" i="0">
-                <a:solidFill>
-                  <a:srgbClr val="595959"/>
-                </a:solidFill>
-                <a:latin typeface="Arial"/>
-              </a:rPr>
-              <a:t>L8</a:t>
-            </a:r>
-          </a:p>
-        </p:txBody>
-      </p:sp>
-      <p:sp>
-        <p:nvSpPr>
-          <p:cNvPr id="4" name="TextBox 3"/>
-          <p:cNvSpPr txBox="1"/>
-          <p:nvPr/>
-        </p:nvSpPr>
-        <p:spPr>
-          <a:xfrm>
-            <a:off x="457200" y="777240"/>
-            <a:ext cx="11277295" cy="640080"/>
-          </a:xfrm>
-          <a:prstGeom prst="rect">
-            <a:avLst/>
-          </a:prstGeom>
-          <a:noFill/>
-        </p:spPr>
-        <p:txBody>
-          <a:bodyPr wrap="square" anchor="t" lIns="0" rIns="0" tIns="0" bIns="0">
-            <a:spAutoFit/>
-          </a:bodyPr>
-          <a:lstStyle/>
+              <a:rPr sz="2100" b="0">
+                <a:solidFill>
+                  <a:srgbClr val="000000"/>
+                </a:solidFill>
+                <a:latin typeface="Arial"/>
+              </a:rPr>
+              <a:t>-  After the fall: 33,280 × 0.96 = 31,948.80</a:t>
+            </a:r>
+          </a:p>
           <a:p>
             <a:pPr algn="l">
-              <a:spcBef>
-                <a:spcPts val="0"/>
-              </a:spcBef>
               <a:spcAft>
-                <a:spcPts val="800"/>
+                <a:spcPts val="1400"/>
               </a:spcAft>
             </a:pPr>
             <a:r>
-              <a:rPr sz="3400" b="1" i="0">
+              <a:rPr sz="2100" b="0">
                 <a:solidFill>
                   <a:srgbClr val="000000"/>
                 </a:solidFill>
                 <a:latin typeface="Arial"/>
               </a:rPr>
-              <a:t>We Do — Guided Practice</a:t>
-            </a:r>
-          </a:p>
-        </p:txBody>
-      </p:sp>
-      <p:sp>
-        <p:nvSpPr>
-          <p:cNvPr id="5" name="TextBox 4"/>
-          <p:cNvSpPr txBox="1"/>
-          <p:nvPr/>
-        </p:nvSpPr>
-        <p:spPr>
-          <a:xfrm>
-            <a:off x="457200" y="1508760"/>
-            <a:ext cx="11277295" cy="960120"/>
-          </a:xfrm>
-          <a:prstGeom prst="rect">
-            <a:avLst/>
-          </a:prstGeom>
-          <a:noFill/>
-        </p:spPr>
-        <p:txBody>
-          <a:bodyPr wrap="square" anchor="t" lIns="0" rIns="0" tIns="0" bIns="0">
-            <a:spAutoFit/>
-          </a:bodyPr>
-          <a:lstStyle/>
-          <a:p>
-            <a:pPr algn="l">
-              <a:spcBef>
-                <a:spcPts val="0"/>
-              </a:spcBef>
-              <a:spcAft>
-                <a:spcPts val="0"/>
-              </a:spcAft>
-            </a:pPr>
-            <a:r>
-              <a:rPr sz="2400" b="1" i="0">
-                <a:solidFill>
-                  <a:srgbClr val="000000"/>
-                </a:solidFill>
-                <a:latin typeface="Arial"/>
-              </a:rPr>
-              <a:t>Find and fix the mistake: 4x + 6 = 2 → 4x = 8 → x = 2</a:t>
-            </a:r>
-          </a:p>
-        </p:txBody>
-      </p:sp>
-      <p:sp>
-        <p:nvSpPr>
-          <p:cNvPr id="6" name="TextBox 5"/>
-          <p:cNvSpPr txBox="1"/>
-          <p:nvPr/>
-        </p:nvSpPr>
-        <p:spPr>
-          <a:xfrm>
-            <a:off x="457200" y="2606040"/>
-            <a:ext cx="11277295" cy="3657600"/>
-          </a:xfrm>
-          <a:prstGeom prst="rect">
-            <a:avLst/>
-          </a:prstGeom>
-          <a:noFill/>
-        </p:spPr>
-        <p:txBody>
-          <a:bodyPr wrap="square" anchor="t" lIns="0" rIns="0" tIns="0" bIns="0">
-            <a:spAutoFit/>
-          </a:bodyPr>
-          <a:lstStyle/>
-          <a:p>
-            <a:pPr algn="l">
-              <a:spcBef>
-                <a:spcPts val="0"/>
-              </a:spcBef>
-              <a:spcAft>
-                <a:spcPts val="1200"/>
-              </a:spcAft>
-            </a:pPr>
-            <a:r>
-              <a:rPr sz="2100" b="0" i="0">
-                <a:solidFill>
-                  <a:srgbClr val="000000"/>
-                </a:solidFill>
-                <a:latin typeface="Arial"/>
-              </a:rPr>
-              <a:t>-  Check step 1: subtract 6 from both sides → 4x = 2 − 6 = -4, not 8. That's the mistake.</a:t>
-            </a:r>
-          </a:p>
-          <a:p>
-            <a:pPr algn="l">
-              <a:spcBef>
-                <a:spcPts val="0"/>
-              </a:spcBef>
-              <a:spcAft>
-                <a:spcPts val="1200"/>
-              </a:spcAft>
-            </a:pPr>
-            <a:r>
-              <a:rPr sz="2100" b="0" i="0">
-                <a:solidFill>
-                  <a:srgbClr val="000000"/>
-                </a:solidFill>
-                <a:latin typeface="Arial"/>
-              </a:rPr>
-              <a:t>-  Corrected: 4x = -4</a:t>
-            </a:r>
-          </a:p>
-          <a:p>
-            <a:pPr algn="l">
-              <a:spcBef>
-                <a:spcPts val="0"/>
-              </a:spcBef>
-              <a:spcAft>
-                <a:spcPts val="1200"/>
-              </a:spcAft>
-            </a:pPr>
-            <a:r>
-              <a:rPr sz="2100" b="0" i="0">
-                <a:solidFill>
-                  <a:srgbClr val="000000"/>
-                </a:solidFill>
-                <a:latin typeface="Arial"/>
-              </a:rPr>
-              <a:t>-  Divide both sides by 4: x = -1</a:t>
-            </a:r>
-          </a:p>
-          <a:p>
-            <a:pPr algn="l">
-              <a:spcBef>
-                <a:spcPts val="0"/>
-              </a:spcBef>
-              <a:spcAft>
-                <a:spcPts val="1200"/>
-              </a:spcAft>
-            </a:pPr>
-            <a:r>
-              <a:rPr sz="2100" b="0" i="0">
-                <a:solidFill>
-                  <a:srgbClr val="000000"/>
-                </a:solidFill>
-                <a:latin typeface="Arial"/>
-              </a:rPr>
-              <a:t>-  Check: 4 × (-1) + 6 = -4 + 6 = 2 ✓</a:t>
+              <a:t>-  No — the salary is now £31,948.80, which is lower than the original £32,000</a:t>
             </a:r>
           </a:p>
         </p:txBody>
@@ -5369,19 +5054,12 @@
           <a:noFill/>
         </p:spPr>
         <p:txBody>
-          <a:bodyPr wrap="square" anchor="t" lIns="0" rIns="0" tIns="0" bIns="0">
-            <a:spAutoFit/>
-          </a:bodyPr>
-          <a:lstStyle/>
-          <a:p>
-            <a:pPr algn="l">
-              <a:spcBef>
-                <a:spcPts val="0"/>
-              </a:spcBef>
-              <a:spcAft>
-                <a:spcPts val="800"/>
-              </a:spcAft>
-            </a:pPr>
+          <a:bodyPr wrap="square">
+            <a:spAutoFit/>
+          </a:bodyPr>
+          <a:lstStyle/>
+          <a:p>
+            <a:pPr algn="l"/>
             <a:r>
               <a:rPr sz="1100" b="0" i="0">
                 <a:solidFill>
@@ -5389,7 +5067,7 @@
                 </a:solidFill>
                 <a:latin typeface="Arial"/>
               </a:rPr>
-              <a:t>Y8 Solving Linear Equations — Lower-to-Middle Set</a:t>
+              <a:t>Y8 Percentages and Proportionality — Middle Set</a:t>
             </a:r>
           </a:p>
         </p:txBody>
@@ -5437,19 +5115,12 @@
           <a:noFill/>
         </p:spPr>
         <p:txBody>
-          <a:bodyPr wrap="square" anchor="t" lIns="0" rIns="0" tIns="0" bIns="0">
-            <a:spAutoFit/>
-          </a:bodyPr>
-          <a:lstStyle/>
-          <a:p>
-            <a:pPr algn="l">
-              <a:spcBef>
-                <a:spcPts val="0"/>
-              </a:spcBef>
-              <a:spcAft>
-                <a:spcPts val="800"/>
-              </a:spcAft>
-            </a:pPr>
+          <a:bodyPr wrap="square">
+            <a:spAutoFit/>
+          </a:bodyPr>
+          <a:lstStyle/>
+          <a:p>
+            <a:pPr algn="l"/>
             <a:r>
               <a:rPr sz="1500" b="1" i="0">
                 <a:solidFill>
@@ -5479,19 +5150,12 @@
           <a:noFill/>
         </p:spPr>
         <p:txBody>
-          <a:bodyPr wrap="square" anchor="t" lIns="0" rIns="0" tIns="0" bIns="0">
-            <a:spAutoFit/>
-          </a:bodyPr>
-          <a:lstStyle/>
-          <a:p>
-            <a:pPr algn="r">
-              <a:spcBef>
-                <a:spcPts val="0"/>
-              </a:spcBef>
-              <a:spcAft>
-                <a:spcPts val="800"/>
-              </a:spcAft>
-            </a:pPr>
+          <a:bodyPr wrap="square">
+            <a:spAutoFit/>
+          </a:bodyPr>
+          <a:lstStyle/>
+          <a:p>
+            <a:pPr algn="r"/>
             <a:r>
               <a:rPr sz="1300" b="0" i="0">
                 <a:solidFill>
@@ -5521,19 +5185,12 @@
           <a:noFill/>
         </p:spPr>
         <p:txBody>
-          <a:bodyPr wrap="square" anchor="t" lIns="0" rIns="0" tIns="0" bIns="0">
-            <a:spAutoFit/>
-          </a:bodyPr>
-          <a:lstStyle/>
-          <a:p>
-            <a:pPr algn="l">
-              <a:spcBef>
-                <a:spcPts val="0"/>
-              </a:spcBef>
-              <a:spcAft>
-                <a:spcPts val="800"/>
-              </a:spcAft>
-            </a:pPr>
+          <a:bodyPr wrap="square">
+            <a:spAutoFit/>
+          </a:bodyPr>
+          <a:lstStyle/>
+          <a:p>
+            <a:pPr algn="l"/>
             <a:r>
               <a:rPr sz="3400" b="1" i="0">
                 <a:solidFill>
@@ -5554,7 +5211,7 @@
         </p:nvSpPr>
         <p:spPr>
           <a:xfrm>
-            <a:off x="457200" y="1371600"/>
+            <a:off x="457200" y="1417320"/>
             <a:ext cx="11277295" cy="365760"/>
           </a:xfrm>
           <a:prstGeom prst="rect">
@@ -5563,21 +5220,14 @@
           <a:noFill/>
         </p:spPr>
         <p:txBody>
-          <a:bodyPr wrap="square" anchor="t" lIns="0" rIns="0" tIns="0" bIns="0">
-            <a:spAutoFit/>
-          </a:bodyPr>
-          <a:lstStyle/>
-          <a:p>
-            <a:pPr algn="l">
-              <a:spcBef>
-                <a:spcPts val="0"/>
-              </a:spcBef>
-              <a:spcAft>
-                <a:spcPts val="800"/>
-              </a:spcAft>
-            </a:pPr>
-            <a:r>
-              <a:rPr sz="1600" b="0" i="1">
+          <a:bodyPr wrap="square">
+            <a:spAutoFit/>
+          </a:bodyPr>
+          <a:lstStyle/>
+          <a:p>
+            <a:pPr algn="l"/>
+            <a:r>
+              <a:rPr sz="1600" b="0" i="0">
                 <a:solidFill>
                   <a:srgbClr val="595959"/>
                 </a:solidFill>
@@ -5590,47 +5240,27 @@
       </p:sp>
       <p:sp>
         <p:nvSpPr>
-          <p:cNvPr id="6" name="Rounded Rectangle 5"/>
-          <p:cNvSpPr/>
-          <p:nvPr/>
-        </p:nvSpPr>
-        <p:spPr>
-          <a:xfrm>
-            <a:off x="457200" y="1874519"/>
-            <a:ext cx="5455767" cy="2103120"/>
-          </a:xfrm>
-          <a:prstGeom prst="roundRect">
-            <a:avLst/>
-          </a:prstGeom>
-          <a:solidFill>
-            <a:srgbClr val="FFFFFF"/>
-          </a:solidFill>
-          <a:ln w="12700">
-            <a:solidFill>
-              <a:srgbClr val="BFBFBF"/>
-            </a:solidFill>
-          </a:ln>
-          <a:effectLst/>
-        </p:spPr>
-        <p:style>
-          <a:lnRef idx="1">
-            <a:schemeClr val="accent1"/>
-          </a:lnRef>
-          <a:fillRef idx="3">
-            <a:schemeClr val="accent1"/>
-          </a:fillRef>
-          <a:effectRef idx="2">
-            <a:schemeClr val="accent1"/>
-          </a:effectRef>
-          <a:fontRef idx="minor">
-            <a:schemeClr val="lt1"/>
-          </a:fontRef>
-        </p:style>
-        <p:txBody>
-          <a:bodyPr rtlCol="0" anchor="ctr" wrap="square" lIns="201168" rIns="201168" tIns="128016" bIns="73152"/>
-          <a:lstStyle/>
-          <a:p>
-            <a:pPr algn="ctr"/>
+          <p:cNvPr id="6" name="TextBox 5"/>
+          <p:cNvSpPr txBox="1"/>
+          <p:nvPr/>
+        </p:nvSpPr>
+        <p:spPr>
+          <a:xfrm>
+            <a:off x="457200" y="1850000"/>
+            <a:ext cx="11277295" cy="240000"/>
+          </a:xfrm>
+          <a:prstGeom prst="rect">
+            <a:avLst/>
+          </a:prstGeom>
+          <a:noFill/>
+        </p:spPr>
+        <p:txBody>
+          <a:bodyPr wrap="square">
+            <a:spAutoFit/>
+          </a:bodyPr>
+          <a:lstStyle/>
+          <a:p>
+            <a:pPr algn="l"/>
             <a:r>
               <a:rPr sz="1500" b="1" i="0">
                 <a:solidFill>
@@ -5641,28 +5271,66 @@
               <a:t>Q1</a:t>
             </a:r>
           </a:p>
-          <a:p>
-            <a:pPr>
-              <a:spcBef>
-                <a:spcPts val="400"/>
-              </a:spcBef>
-            </a:pPr>
-            <a:r>
-              <a:rPr sz="2000" b="1" i="0">
+        </p:txBody>
+      </p:sp>
+      <p:sp>
+        <p:nvSpPr>
+          <p:cNvPr id="7" name="TextBox 6"/>
+          <p:cNvSpPr txBox="1"/>
+          <p:nvPr/>
+        </p:nvSpPr>
+        <p:spPr>
+          <a:xfrm>
+            <a:off x="457200" y="2129263"/>
+            <a:ext cx="11277295" cy="308610"/>
+          </a:xfrm>
+          <a:prstGeom prst="rect">
+            <a:avLst/>
+          </a:prstGeom>
+          <a:noFill/>
+        </p:spPr>
+        <p:txBody>
+          <a:bodyPr wrap="square">
+            <a:spAutoFit/>
+          </a:bodyPr>
+          <a:lstStyle/>
+          <a:p>
+            <a:pPr algn="l"/>
+            <a:r>
+              <a:rPr sz="1800" b="1" i="0">
                 <a:solidFill>
                   <a:srgbClr val="000000"/>
                 </a:solidFill>
                 <a:latin typeface="Arial"/>
               </a:rPr>
-              <a:t>2x + 5 = 13</a:t>
-            </a:r>
-          </a:p>
-          <a:p>
-            <a:pPr>
-              <a:spcBef>
-                <a:spcPts val="600"/>
-              </a:spcBef>
-            </a:pPr>
+              <a:t>Find 65% of £140.</a:t>
+            </a:r>
+          </a:p>
+        </p:txBody>
+      </p:sp>
+      <p:sp>
+        <p:nvSpPr>
+          <p:cNvPr id="8" name="TextBox 7"/>
+          <p:cNvSpPr txBox="1"/>
+          <p:nvPr/>
+        </p:nvSpPr>
+        <p:spPr>
+          <a:xfrm>
+            <a:off x="457200" y="2526216"/>
+            <a:ext cx="11277295" cy="274320"/>
+          </a:xfrm>
+          <a:prstGeom prst="rect">
+            <a:avLst/>
+          </a:prstGeom>
+          <a:noFill/>
+        </p:spPr>
+        <p:txBody>
+          <a:bodyPr wrap="square">
+            <a:spAutoFit/>
+          </a:bodyPr>
+          <a:lstStyle/>
+          <a:p>
+            <a:pPr algn="l"/>
             <a:r>
               <a:rPr sz="1600" b="1" i="0">
                 <a:solidFill>
@@ -5670,54 +5338,34 @@
                 </a:solidFill>
                 <a:latin typeface="Arial"/>
               </a:rPr>
-              <a:t>Answer: x = 4</a:t>
-            </a:r>
-          </a:p>
-        </p:txBody>
-      </p:sp>
-      <p:sp>
-        <p:nvSpPr>
-          <p:cNvPr id="7" name="Rounded Rectangle 6"/>
-          <p:cNvSpPr/>
-          <p:nvPr/>
-        </p:nvSpPr>
-        <p:spPr>
-          <a:xfrm>
-            <a:off x="6278727" y="1874519"/>
-            <a:ext cx="5455767" cy="2103120"/>
-          </a:xfrm>
-          <a:prstGeom prst="roundRect">
-            <a:avLst/>
-          </a:prstGeom>
-          <a:solidFill>
-            <a:srgbClr val="FFFFFF"/>
-          </a:solidFill>
-          <a:ln w="12700">
-            <a:solidFill>
-              <a:srgbClr val="BFBFBF"/>
-            </a:solidFill>
-          </a:ln>
-          <a:effectLst/>
-        </p:spPr>
-        <p:style>
-          <a:lnRef idx="1">
-            <a:schemeClr val="accent1"/>
-          </a:lnRef>
-          <a:fillRef idx="3">
-            <a:schemeClr val="accent1"/>
-          </a:fillRef>
-          <a:effectRef idx="2">
-            <a:schemeClr val="accent1"/>
-          </a:effectRef>
-          <a:fontRef idx="minor">
-            <a:schemeClr val="lt1"/>
-          </a:fontRef>
-        </p:style>
-        <p:txBody>
-          <a:bodyPr rtlCol="0" anchor="ctr" wrap="square" lIns="201168" rIns="201168" tIns="128016" bIns="73152"/>
-          <a:lstStyle/>
-          <a:p>
-            <a:pPr algn="ctr"/>
+              <a:t>Answer: £91</a:t>
+            </a:r>
+          </a:p>
+        </p:txBody>
+      </p:sp>
+      <p:sp>
+        <p:nvSpPr>
+          <p:cNvPr id="9" name="TextBox 8"/>
+          <p:cNvSpPr txBox="1"/>
+          <p:nvPr/>
+        </p:nvSpPr>
+        <p:spPr>
+          <a:xfrm>
+            <a:off x="457200" y="3016486"/>
+            <a:ext cx="11277295" cy="240000"/>
+          </a:xfrm>
+          <a:prstGeom prst="rect">
+            <a:avLst/>
+          </a:prstGeom>
+          <a:noFill/>
+        </p:spPr>
+        <p:txBody>
+          <a:bodyPr wrap="square">
+            <a:spAutoFit/>
+          </a:bodyPr>
+          <a:lstStyle/>
+          <a:p>
+            <a:pPr algn="l"/>
             <a:r>
               <a:rPr sz="1500" b="1" i="0">
                 <a:solidFill>
@@ -5728,28 +5376,66 @@
               <a:t>Q2</a:t>
             </a:r>
           </a:p>
-          <a:p>
-            <a:pPr>
-              <a:spcBef>
-                <a:spcPts val="400"/>
-              </a:spcBef>
-            </a:pPr>
-            <a:r>
-              <a:rPr sz="2000" b="1" i="0">
+        </p:txBody>
+      </p:sp>
+      <p:sp>
+        <p:nvSpPr>
+          <p:cNvPr id="10" name="TextBox 9"/>
+          <p:cNvSpPr txBox="1"/>
+          <p:nvPr/>
+        </p:nvSpPr>
+        <p:spPr>
+          <a:xfrm>
+            <a:off x="457200" y="3295749"/>
+            <a:ext cx="11277295" cy="308610"/>
+          </a:xfrm>
+          <a:prstGeom prst="rect">
+            <a:avLst/>
+          </a:prstGeom>
+          <a:noFill/>
+        </p:spPr>
+        <p:txBody>
+          <a:bodyPr wrap="square">
+            <a:spAutoFit/>
+          </a:bodyPr>
+          <a:lstStyle/>
+          <a:p>
+            <a:pPr algn="l"/>
+            <a:r>
+              <a:rPr sz="1800" b="1" i="0">
                 <a:solidFill>
                   <a:srgbClr val="000000"/>
                 </a:solidFill>
                 <a:latin typeface="Arial"/>
               </a:rPr>
-              <a:t>x ÷ 3 + 4 = 1</a:t>
-            </a:r>
-          </a:p>
-          <a:p>
-            <a:pPr>
-              <a:spcBef>
-                <a:spcPts val="600"/>
-              </a:spcBef>
-            </a:pPr>
+              <a:t>Increase £84 by 25%.</a:t>
+            </a:r>
+          </a:p>
+        </p:txBody>
+      </p:sp>
+      <p:sp>
+        <p:nvSpPr>
+          <p:cNvPr id="11" name="TextBox 10"/>
+          <p:cNvSpPr txBox="1"/>
+          <p:nvPr/>
+        </p:nvSpPr>
+        <p:spPr>
+          <a:xfrm>
+            <a:off x="457200" y="3692702"/>
+            <a:ext cx="11277295" cy="274320"/>
+          </a:xfrm>
+          <a:prstGeom prst="rect">
+            <a:avLst/>
+          </a:prstGeom>
+          <a:noFill/>
+        </p:spPr>
+        <p:txBody>
+          <a:bodyPr wrap="square">
+            <a:spAutoFit/>
+          </a:bodyPr>
+          <a:lstStyle/>
+          <a:p>
+            <a:pPr algn="l"/>
             <a:r>
               <a:rPr sz="1600" b="1" i="0">
                 <a:solidFill>
@@ -5757,54 +5443,34 @@
                 </a:solidFill>
                 <a:latin typeface="Arial"/>
               </a:rPr>
-              <a:t>Answer: x = -9</a:t>
-            </a:r>
-          </a:p>
-        </p:txBody>
-      </p:sp>
-      <p:sp>
-        <p:nvSpPr>
-          <p:cNvPr id="8" name="Rounded Rectangle 7"/>
-          <p:cNvSpPr/>
-          <p:nvPr/>
-        </p:nvSpPr>
-        <p:spPr>
-          <a:xfrm>
-            <a:off x="457200" y="4160520"/>
-            <a:ext cx="5455767" cy="2103120"/>
-          </a:xfrm>
-          <a:prstGeom prst="roundRect">
-            <a:avLst/>
-          </a:prstGeom>
-          <a:solidFill>
-            <a:srgbClr val="FFFFFF"/>
-          </a:solidFill>
-          <a:ln w="12700">
-            <a:solidFill>
-              <a:srgbClr val="BFBFBF"/>
-            </a:solidFill>
-          </a:ln>
-          <a:effectLst/>
-        </p:spPr>
-        <p:style>
-          <a:lnRef idx="1">
-            <a:schemeClr val="accent1"/>
-          </a:lnRef>
-          <a:fillRef idx="3">
-            <a:schemeClr val="accent1"/>
-          </a:fillRef>
-          <a:effectRef idx="2">
-            <a:schemeClr val="accent1"/>
-          </a:effectRef>
-          <a:fontRef idx="minor">
-            <a:schemeClr val="lt1"/>
-          </a:fontRef>
-        </p:style>
-        <p:txBody>
-          <a:bodyPr rtlCol="0" anchor="ctr" wrap="square" lIns="201168" rIns="201168" tIns="128016" bIns="73152"/>
-          <a:lstStyle/>
-          <a:p>
-            <a:pPr algn="ctr"/>
+              <a:t>Answer: £105</a:t>
+            </a:r>
+          </a:p>
+        </p:txBody>
+      </p:sp>
+      <p:sp>
+        <p:nvSpPr>
+          <p:cNvPr id="12" name="TextBox 11"/>
+          <p:cNvSpPr txBox="1"/>
+          <p:nvPr/>
+        </p:nvSpPr>
+        <p:spPr>
+          <a:xfrm>
+            <a:off x="457200" y="4182972"/>
+            <a:ext cx="11277295" cy="240000"/>
+          </a:xfrm>
+          <a:prstGeom prst="rect">
+            <a:avLst/>
+          </a:prstGeom>
+          <a:noFill/>
+        </p:spPr>
+        <p:txBody>
+          <a:bodyPr wrap="square">
+            <a:spAutoFit/>
+          </a:bodyPr>
+          <a:lstStyle/>
+          <a:p>
+            <a:pPr algn="l"/>
             <a:r>
               <a:rPr sz="1500" b="1" i="0">
                 <a:solidFill>
@@ -5815,28 +5481,66 @@
               <a:t>Q3</a:t>
             </a:r>
           </a:p>
-          <a:p>
-            <a:pPr>
-              <a:spcBef>
-                <a:spcPts val="400"/>
-              </a:spcBef>
-            </a:pPr>
-            <a:r>
-              <a:rPr sz="2000" b="1" i="0">
+        </p:txBody>
+      </p:sp>
+      <p:sp>
+        <p:nvSpPr>
+          <p:cNvPr id="13" name="TextBox 12"/>
+          <p:cNvSpPr txBox="1"/>
+          <p:nvPr/>
+        </p:nvSpPr>
+        <p:spPr>
+          <a:xfrm>
+            <a:off x="457200" y="4462235"/>
+            <a:ext cx="11277295" cy="308610"/>
+          </a:xfrm>
+          <a:prstGeom prst="rect">
+            <a:avLst/>
+          </a:prstGeom>
+          <a:noFill/>
+        </p:spPr>
+        <p:txBody>
+          <a:bodyPr wrap="square">
+            <a:spAutoFit/>
+          </a:bodyPr>
+          <a:lstStyle/>
+          <a:p>
+            <a:pPr algn="l"/>
+            <a:r>
+              <a:rPr sz="1800" b="1" i="0">
                 <a:solidFill>
                   <a:srgbClr val="000000"/>
                 </a:solidFill>
                 <a:latin typeface="Arial"/>
               </a:rPr>
-              <a:t>-5x + 2 = 17</a:t>
-            </a:r>
-          </a:p>
-          <a:p>
-            <a:pPr>
-              <a:spcBef>
-                <a:spcPts val="600"/>
-              </a:spcBef>
-            </a:pPr>
+              <a:t>Original price before 30% off if the sale price is £56.</a:t>
+            </a:r>
+          </a:p>
+        </p:txBody>
+      </p:sp>
+      <p:sp>
+        <p:nvSpPr>
+          <p:cNvPr id="14" name="TextBox 13"/>
+          <p:cNvSpPr txBox="1"/>
+          <p:nvPr/>
+        </p:nvSpPr>
+        <p:spPr>
+          <a:xfrm>
+            <a:off x="457200" y="4859188"/>
+            <a:ext cx="11277295" cy="274320"/>
+          </a:xfrm>
+          <a:prstGeom prst="rect">
+            <a:avLst/>
+          </a:prstGeom>
+          <a:noFill/>
+        </p:spPr>
+        <p:txBody>
+          <a:bodyPr wrap="square">
+            <a:spAutoFit/>
+          </a:bodyPr>
+          <a:lstStyle/>
+          <a:p>
+            <a:pPr algn="l"/>
             <a:r>
               <a:rPr sz="1600" b="1" i="0">
                 <a:solidFill>
@@ -5844,54 +5548,34 @@
                 </a:solidFill>
                 <a:latin typeface="Arial"/>
               </a:rPr>
-              <a:t>Answer: x = -3</a:t>
-            </a:r>
-          </a:p>
-        </p:txBody>
-      </p:sp>
-      <p:sp>
-        <p:nvSpPr>
-          <p:cNvPr id="9" name="Rounded Rectangle 8"/>
-          <p:cNvSpPr/>
-          <p:nvPr/>
-        </p:nvSpPr>
-        <p:spPr>
-          <a:xfrm>
-            <a:off x="6278727" y="4160520"/>
-            <a:ext cx="5455767" cy="2103120"/>
-          </a:xfrm>
-          <a:prstGeom prst="roundRect">
-            <a:avLst/>
-          </a:prstGeom>
-          <a:solidFill>
-            <a:srgbClr val="FFFFFF"/>
-          </a:solidFill>
-          <a:ln w="12700">
-            <a:solidFill>
-              <a:srgbClr val="BFBFBF"/>
-            </a:solidFill>
-          </a:ln>
-          <a:effectLst/>
-        </p:spPr>
-        <p:style>
-          <a:lnRef idx="1">
-            <a:schemeClr val="accent1"/>
-          </a:lnRef>
-          <a:fillRef idx="3">
-            <a:schemeClr val="accent1"/>
-          </a:fillRef>
-          <a:effectRef idx="2">
-            <a:schemeClr val="accent1"/>
-          </a:effectRef>
-          <a:fontRef idx="minor">
-            <a:schemeClr val="lt1"/>
-          </a:fontRef>
-        </p:style>
-        <p:txBody>
-          <a:bodyPr rtlCol="0" anchor="ctr" wrap="square" lIns="201168" rIns="201168" tIns="128016" bIns="73152"/>
-          <a:lstStyle/>
-          <a:p>
-            <a:pPr algn="ctr"/>
+              <a:t>Answer: £80</a:t>
+            </a:r>
+          </a:p>
+        </p:txBody>
+      </p:sp>
+      <p:sp>
+        <p:nvSpPr>
+          <p:cNvPr id="15" name="TextBox 14"/>
+          <p:cNvSpPr txBox="1"/>
+          <p:nvPr/>
+        </p:nvSpPr>
+        <p:spPr>
+          <a:xfrm>
+            <a:off x="457200" y="5349458"/>
+            <a:ext cx="11277295" cy="240000"/>
+          </a:xfrm>
+          <a:prstGeom prst="rect">
+            <a:avLst/>
+          </a:prstGeom>
+          <a:noFill/>
+        </p:spPr>
+        <p:txBody>
+          <a:bodyPr wrap="square">
+            <a:spAutoFit/>
+          </a:bodyPr>
+          <a:lstStyle/>
+          <a:p>
+            <a:pPr algn="l"/>
             <a:r>
               <a:rPr sz="1500" b="1" i="0">
                 <a:solidFill>
@@ -5902,28 +5586,66 @@
               <a:t>Q4</a:t>
             </a:r>
           </a:p>
-          <a:p>
-            <a:pPr>
-              <a:spcBef>
-                <a:spcPts val="400"/>
-              </a:spcBef>
-            </a:pPr>
-            <a:r>
-              <a:rPr sz="2000" b="1" i="0">
+        </p:txBody>
+      </p:sp>
+      <p:sp>
+        <p:nvSpPr>
+          <p:cNvPr id="16" name="TextBox 15"/>
+          <p:cNvSpPr txBox="1"/>
+          <p:nvPr/>
+        </p:nvSpPr>
+        <p:spPr>
+          <a:xfrm>
+            <a:off x="457200" y="5628721"/>
+            <a:ext cx="11277295" cy="308610"/>
+          </a:xfrm>
+          <a:prstGeom prst="rect">
+            <a:avLst/>
+          </a:prstGeom>
+          <a:noFill/>
+        </p:spPr>
+        <p:txBody>
+          <a:bodyPr wrap="square">
+            <a:spAutoFit/>
+          </a:bodyPr>
+          <a:lstStyle/>
+          <a:p>
+            <a:pPr algn="l"/>
+            <a:r>
+              <a:rPr sz="1800" b="1" i="0">
                 <a:solidFill>
                   <a:srgbClr val="000000"/>
                 </a:solidFill>
                 <a:latin typeface="Arial"/>
               </a:rPr>
-              <a:t>7x − 9 = 19</a:t>
-            </a:r>
-          </a:p>
-          <a:p>
-            <a:pPr>
-              <a:spcBef>
-                <a:spcPts val="600"/>
-              </a:spcBef>
-            </a:pPr>
+              <a:t>Convert 5/8 to a percentage.</a:t>
+            </a:r>
+          </a:p>
+        </p:txBody>
+      </p:sp>
+      <p:sp>
+        <p:nvSpPr>
+          <p:cNvPr id="17" name="TextBox 16"/>
+          <p:cNvSpPr txBox="1"/>
+          <p:nvPr/>
+        </p:nvSpPr>
+        <p:spPr>
+          <a:xfrm>
+            <a:off x="457200" y="6025674"/>
+            <a:ext cx="11277295" cy="274320"/>
+          </a:xfrm>
+          <a:prstGeom prst="rect">
+            <a:avLst/>
+          </a:prstGeom>
+          <a:noFill/>
+        </p:spPr>
+        <p:txBody>
+          <a:bodyPr wrap="square">
+            <a:spAutoFit/>
+          </a:bodyPr>
+          <a:lstStyle/>
+          <a:p>
+            <a:pPr algn="l"/>
             <a:r>
               <a:rPr sz="1600" b="1" i="0">
                 <a:solidFill>
@@ -5931,14 +5653,14 @@
                 </a:solidFill>
                 <a:latin typeface="Arial"/>
               </a:rPr>
-              <a:t>Answer: x = 4</a:t>
-            </a:r>
-          </a:p>
-        </p:txBody>
-      </p:sp>
-      <p:sp>
-        <p:nvSpPr>
-          <p:cNvPr id="10" name="TextBox 9"/>
+              <a:t>Answer: 62.5%</a:t>
+            </a:r>
+          </a:p>
+        </p:txBody>
+      </p:sp>
+      <p:sp>
+        <p:nvSpPr>
+          <p:cNvPr id="18" name="TextBox 17"/>
           <p:cNvSpPr txBox="1"/>
           <p:nvPr/>
         </p:nvSpPr>
@@ -5953,19 +5675,12 @@
           <a:noFill/>
         </p:spPr>
         <p:txBody>
-          <a:bodyPr wrap="square" anchor="t" lIns="0" rIns="0" tIns="0" bIns="0">
-            <a:spAutoFit/>
-          </a:bodyPr>
-          <a:lstStyle/>
-          <a:p>
-            <a:pPr algn="l">
-              <a:spcBef>
-                <a:spcPts val="0"/>
-              </a:spcBef>
-              <a:spcAft>
-                <a:spcPts val="800"/>
-              </a:spcAft>
-            </a:pPr>
+          <a:bodyPr wrap="square">
+            <a:spAutoFit/>
+          </a:bodyPr>
+          <a:lstStyle/>
+          <a:p>
+            <a:pPr algn="l"/>
             <a:r>
               <a:rPr sz="1100" b="0" i="0">
                 <a:solidFill>
@@ -6021,19 +5736,12 @@
           <a:noFill/>
         </p:spPr>
         <p:txBody>
-          <a:bodyPr wrap="square" anchor="t" lIns="0" rIns="0" tIns="0" bIns="0">
-            <a:spAutoFit/>
-          </a:bodyPr>
-          <a:lstStyle/>
-          <a:p>
-            <a:pPr algn="l">
-              <a:spcBef>
-                <a:spcPts val="0"/>
-              </a:spcBef>
-              <a:spcAft>
-                <a:spcPts val="800"/>
-              </a:spcAft>
-            </a:pPr>
+          <a:bodyPr wrap="square">
+            <a:spAutoFit/>
+          </a:bodyPr>
+          <a:lstStyle/>
+          <a:p>
+            <a:pPr algn="l"/>
             <a:r>
               <a:rPr sz="1500" b="1" i="0">
                 <a:solidFill>
@@ -6063,19 +5771,12 @@
           <a:noFill/>
         </p:spPr>
         <p:txBody>
-          <a:bodyPr wrap="square" anchor="t" lIns="0" rIns="0" tIns="0" bIns="0">
-            <a:spAutoFit/>
-          </a:bodyPr>
-          <a:lstStyle/>
-          <a:p>
-            <a:pPr algn="r">
-              <a:spcBef>
-                <a:spcPts val="0"/>
-              </a:spcBef>
-              <a:spcAft>
-                <a:spcPts val="800"/>
-              </a:spcAft>
-            </a:pPr>
+          <a:bodyPr wrap="square">
+            <a:spAutoFit/>
+          </a:bodyPr>
+          <a:lstStyle/>
+          <a:p>
+            <a:pPr algn="r"/>
             <a:r>
               <a:rPr sz="1300" b="0" i="0">
                 <a:solidFill>
@@ -6105,19 +5806,12 @@
           <a:noFill/>
         </p:spPr>
         <p:txBody>
-          <a:bodyPr wrap="square" anchor="t" lIns="0" rIns="0" tIns="0" bIns="0">
-            <a:spAutoFit/>
-          </a:bodyPr>
-          <a:lstStyle/>
-          <a:p>
-            <a:pPr algn="l">
-              <a:spcBef>
-                <a:spcPts val="0"/>
-              </a:spcBef>
-              <a:spcAft>
-                <a:spcPts val="800"/>
-              </a:spcAft>
-            </a:pPr>
+          <a:bodyPr wrap="square">
+            <a:spAutoFit/>
+          </a:bodyPr>
+          <a:lstStyle/>
+          <a:p>
+            <a:pPr algn="l"/>
             <a:r>
               <a:rPr sz="3400" b="1" i="0">
                 <a:solidFill>
@@ -6147,21 +5841,14 @@
           <a:noFill/>
         </p:spPr>
         <p:txBody>
-          <a:bodyPr wrap="square" anchor="t" lIns="0" rIns="0" tIns="0" bIns="0">
-            <a:spAutoFit/>
-          </a:bodyPr>
-          <a:lstStyle/>
-          <a:p>
-            <a:pPr algn="l">
-              <a:spcBef>
-                <a:spcPts val="0"/>
-              </a:spcBef>
-              <a:spcAft>
-                <a:spcPts val="800"/>
-              </a:spcAft>
-            </a:pPr>
-            <a:r>
-              <a:rPr sz="1600" b="0" i="1">
+          <a:bodyPr wrap="square">
+            <a:spAutoFit/>
+          </a:bodyPr>
+          <a:lstStyle/>
+          <a:p>
+            <a:pPr algn="l"/>
+            <a:r>
+              <a:rPr sz="1600" b="0" i="0">
                 <a:solidFill>
                   <a:srgbClr val="595959"/>
                 </a:solidFill>
@@ -6174,47 +5861,27 @@
       </p:sp>
       <p:sp>
         <p:nvSpPr>
-          <p:cNvPr id="6" name="Rounded Rectangle 5"/>
-          <p:cNvSpPr/>
-          <p:nvPr/>
-        </p:nvSpPr>
-        <p:spPr>
-          <a:xfrm>
-            <a:off x="457200" y="1965960"/>
-            <a:ext cx="11277295" cy="2057400"/>
-          </a:xfrm>
-          <a:prstGeom prst="roundRect">
-            <a:avLst/>
-          </a:prstGeom>
-          <a:solidFill>
-            <a:srgbClr val="F2F2F2"/>
-          </a:solidFill>
-          <a:ln w="9525">
-            <a:solidFill>
-              <a:srgbClr val="CCCCCC"/>
-            </a:solidFill>
-          </a:ln>
-          <a:effectLst/>
-        </p:spPr>
-        <p:style>
-          <a:lnRef idx="1">
-            <a:schemeClr val="accent1"/>
-          </a:lnRef>
-          <a:fillRef idx="3">
-            <a:schemeClr val="accent1"/>
-          </a:fillRef>
-          <a:effectRef idx="2">
-            <a:schemeClr val="accent1"/>
-          </a:effectRef>
-          <a:fontRef idx="minor">
-            <a:schemeClr val="lt1"/>
-          </a:fontRef>
-        </p:style>
-        <p:txBody>
-          <a:bodyPr rtlCol="0" anchor="ctr" wrap="square" lIns="256032" rIns="256032" tIns="128016" bIns="73152"/>
-          <a:lstStyle/>
-          <a:p>
-            <a:pPr algn="ctr"/>
+          <p:cNvPr id="6" name="TextBox 5"/>
+          <p:cNvSpPr txBox="1"/>
+          <p:nvPr/>
+        </p:nvSpPr>
+        <p:spPr>
+          <a:xfrm>
+            <a:off x="457200" y="1950000"/>
+            <a:ext cx="11277295" cy="240000"/>
+          </a:xfrm>
+          <a:prstGeom prst="rect">
+            <a:avLst/>
+          </a:prstGeom>
+          <a:noFill/>
+        </p:spPr>
+        <p:txBody>
+          <a:bodyPr wrap="square">
+            <a:spAutoFit/>
+          </a:bodyPr>
+          <a:lstStyle/>
+          <a:p>
+            <a:pPr algn="l"/>
             <a:r>
               <a:rPr sz="1500" b="1" i="0">
                 <a:solidFill>
@@ -6225,28 +5892,66 @@
               <a:t>Challenge 1</a:t>
             </a:r>
           </a:p>
-          <a:p>
-            <a:pPr>
-              <a:spcBef>
-                <a:spcPts val="400"/>
-              </a:spcBef>
-            </a:pPr>
-            <a:r>
-              <a:rPr sz="1900" b="0" i="0">
+        </p:txBody>
+      </p:sp>
+      <p:sp>
+        <p:nvSpPr>
+          <p:cNvPr id="7" name="TextBox 6"/>
+          <p:cNvSpPr txBox="1"/>
+          <p:nvPr/>
+        </p:nvSpPr>
+        <p:spPr>
+          <a:xfrm>
+            <a:off x="457200" y="2230000"/>
+            <a:ext cx="11277295" cy="651510"/>
+          </a:xfrm>
+          <a:prstGeom prst="rect">
+            <a:avLst/>
+          </a:prstGeom>
+          <a:noFill/>
+        </p:spPr>
+        <p:txBody>
+          <a:bodyPr wrap="square">
+            <a:spAutoFit/>
+          </a:bodyPr>
+          <a:lstStyle/>
+          <a:p>
+            <a:pPr algn="l"/>
+            <a:r>
+              <a:rPr sz="1900" b="1" i="0">
                 <a:solidFill>
                   <a:srgbClr val="000000"/>
                 </a:solidFill>
                 <a:latin typeface="Arial"/>
               </a:rPr>
-              <a:t>Find and fix: '6x − 4 = 20 → 6x = 16 → x = 2.67'</a:t>
-            </a:r>
-          </a:p>
-          <a:p>
-            <a:pPr>
-              <a:spcBef>
-                <a:spcPts val="600"/>
-              </a:spcBef>
-            </a:pPr>
+              <a:t>A laptop is £600. It is reduced by 20%, then increases by 20%. Find the final price and compare to £600.</a:t>
+            </a:r>
+          </a:p>
+        </p:txBody>
+      </p:sp>
+      <p:sp>
+        <p:nvSpPr>
+          <p:cNvPr id="8" name="TextBox 7"/>
+          <p:cNvSpPr txBox="1"/>
+          <p:nvPr/>
+        </p:nvSpPr>
+        <p:spPr>
+          <a:xfrm>
+            <a:off x="457200" y="2971510"/>
+            <a:ext cx="11277295" cy="274320"/>
+          </a:xfrm>
+          <a:prstGeom prst="rect">
+            <a:avLst/>
+          </a:prstGeom>
+          <a:noFill/>
+        </p:spPr>
+        <p:txBody>
+          <a:bodyPr wrap="square">
+            <a:spAutoFit/>
+          </a:bodyPr>
+          <a:lstStyle/>
+          <a:p>
+            <a:pPr algn="l"/>
             <a:r>
               <a:rPr sz="1600" b="1" i="0">
                 <a:solidFill>
@@ -6254,54 +5959,34 @@
                 </a:solidFill>
                 <a:latin typeface="Arial"/>
               </a:rPr>
-              <a:t>Answer: x = 4 (6x = 24)</a:t>
-            </a:r>
-          </a:p>
-        </p:txBody>
-      </p:sp>
-      <p:sp>
-        <p:nvSpPr>
-          <p:cNvPr id="7" name="Rounded Rectangle 6"/>
-          <p:cNvSpPr/>
-          <p:nvPr/>
-        </p:nvSpPr>
-        <p:spPr>
-          <a:xfrm>
-            <a:off x="457200" y="4206240"/>
-            <a:ext cx="11277295" cy="2057400"/>
-          </a:xfrm>
-          <a:prstGeom prst="roundRect">
-            <a:avLst/>
-          </a:prstGeom>
-          <a:solidFill>
-            <a:srgbClr val="F2F2F2"/>
-          </a:solidFill>
-          <a:ln w="9525">
-            <a:solidFill>
-              <a:srgbClr val="CCCCCC"/>
-            </a:solidFill>
-          </a:ln>
-          <a:effectLst/>
-        </p:spPr>
-        <p:style>
-          <a:lnRef idx="1">
-            <a:schemeClr val="accent1"/>
-          </a:lnRef>
-          <a:fillRef idx="3">
-            <a:schemeClr val="accent1"/>
-          </a:fillRef>
-          <a:effectRef idx="2">
-            <a:schemeClr val="accent1"/>
-          </a:effectRef>
-          <a:fontRef idx="minor">
-            <a:schemeClr val="lt1"/>
-          </a:fontRef>
-        </p:style>
-        <p:txBody>
-          <a:bodyPr rtlCol="0" anchor="ctr" wrap="square" lIns="256032" rIns="256032" tIns="128016" bIns="73152"/>
-          <a:lstStyle/>
-          <a:p>
-            <a:pPr algn="ctr"/>
+              <a:t>Answer: £576 — lower than the original £600</a:t>
+            </a:r>
+          </a:p>
+        </p:txBody>
+      </p:sp>
+      <p:sp>
+        <p:nvSpPr>
+          <p:cNvPr id="9" name="TextBox 8"/>
+          <p:cNvSpPr txBox="1"/>
+          <p:nvPr/>
+        </p:nvSpPr>
+        <p:spPr>
+          <a:xfrm>
+            <a:off x="457200" y="3465830"/>
+            <a:ext cx="11277295" cy="240000"/>
+          </a:xfrm>
+          <a:prstGeom prst="rect">
+            <a:avLst/>
+          </a:prstGeom>
+          <a:noFill/>
+        </p:spPr>
+        <p:txBody>
+          <a:bodyPr wrap="square">
+            <a:spAutoFit/>
+          </a:bodyPr>
+          <a:lstStyle/>
+          <a:p>
+            <a:pPr algn="l"/>
             <a:r>
               <a:rPr sz="1500" b="1" i="0">
                 <a:solidFill>
@@ -6312,28 +5997,66 @@
               <a:t>Challenge 2</a:t>
             </a:r>
           </a:p>
-          <a:p>
-            <a:pPr>
-              <a:spcBef>
-                <a:spcPts val="400"/>
-              </a:spcBef>
-            </a:pPr>
-            <a:r>
-              <a:rPr sz="1900" b="0" i="0">
+        </p:txBody>
+      </p:sp>
+      <p:sp>
+        <p:nvSpPr>
+          <p:cNvPr id="10" name="TextBox 9"/>
+          <p:cNvSpPr txBox="1"/>
+          <p:nvPr/>
+        </p:nvSpPr>
+        <p:spPr>
+          <a:xfrm>
+            <a:off x="457200" y="3745830"/>
+            <a:ext cx="11277295" cy="325755"/>
+          </a:xfrm>
+          <a:prstGeom prst="rect">
+            <a:avLst/>
+          </a:prstGeom>
+          <a:noFill/>
+        </p:spPr>
+        <p:txBody>
+          <a:bodyPr wrap="square">
+            <a:spAutoFit/>
+          </a:bodyPr>
+          <a:lstStyle/>
+          <a:p>
+            <a:pPr algn="l"/>
+            <a:r>
+              <a:rPr sz="1900" b="1" i="0">
                 <a:solidFill>
                   <a:srgbClr val="000000"/>
                 </a:solidFill>
                 <a:latin typeface="Arial"/>
               </a:rPr>
-              <a:t>-4x + 15 = 3</a:t>
-            </a:r>
-          </a:p>
-          <a:p>
-            <a:pPr>
-              <a:spcBef>
-                <a:spcPts val="600"/>
-              </a:spcBef>
-            </a:pPr>
+              <a:t>A price rises by 10% to £198. Find the original price.</a:t>
+            </a:r>
+          </a:p>
+        </p:txBody>
+      </p:sp>
+      <p:sp>
+        <p:nvSpPr>
+          <p:cNvPr id="11" name="TextBox 10"/>
+          <p:cNvSpPr txBox="1"/>
+          <p:nvPr/>
+        </p:nvSpPr>
+        <p:spPr>
+          <a:xfrm>
+            <a:off x="457200" y="4161585"/>
+            <a:ext cx="11277295" cy="274320"/>
+          </a:xfrm>
+          <a:prstGeom prst="rect">
+            <a:avLst/>
+          </a:prstGeom>
+          <a:noFill/>
+        </p:spPr>
+        <p:txBody>
+          <a:bodyPr wrap="square">
+            <a:spAutoFit/>
+          </a:bodyPr>
+          <a:lstStyle/>
+          <a:p>
+            <a:pPr algn="l"/>
             <a:r>
               <a:rPr sz="1600" b="1" i="0">
                 <a:solidFill>
@@ -6341,14 +6064,14 @@
                 </a:solidFill>
                 <a:latin typeface="Arial"/>
               </a:rPr>
-              <a:t>Answer: x = 3</a:t>
-            </a:r>
-          </a:p>
-        </p:txBody>
-      </p:sp>
-      <p:sp>
-        <p:nvSpPr>
-          <p:cNvPr id="8" name="TextBox 7"/>
+              <a:t>Answer: £180</a:t>
+            </a:r>
+          </a:p>
+        </p:txBody>
+      </p:sp>
+      <p:sp>
+        <p:nvSpPr>
+          <p:cNvPr id="12" name="TextBox 11"/>
           <p:cNvSpPr txBox="1"/>
           <p:nvPr/>
         </p:nvSpPr>
@@ -6363,19 +6086,12 @@
           <a:noFill/>
         </p:spPr>
         <p:txBody>
-          <a:bodyPr wrap="square" anchor="t" lIns="0" rIns="0" tIns="0" bIns="0">
-            <a:spAutoFit/>
-          </a:bodyPr>
-          <a:lstStyle/>
-          <a:p>
-            <a:pPr algn="l">
-              <a:spcBef>
-                <a:spcPts val="0"/>
-              </a:spcBef>
-              <a:spcAft>
-                <a:spcPts val="800"/>
-              </a:spcAft>
-            </a:pPr>
+          <a:bodyPr wrap="square">
+            <a:spAutoFit/>
+          </a:bodyPr>
+          <a:lstStyle/>
+          <a:p>
+            <a:pPr algn="l"/>
             <a:r>
               <a:rPr sz="1100" b="0" i="0">
                 <a:solidFill>
@@ -6383,7 +6099,7 @@
                 </a:solidFill>
                 <a:latin typeface="Arial"/>
               </a:rPr>
-              <a:t>Y8 Solving Linear Equations — Lower-to-Middle Set</a:t>
+              <a:t>Y8 Percentages and Proportionality — Middle Set</a:t>
             </a:r>
           </a:p>
         </p:txBody>
@@ -6431,19 +6147,12 @@
           <a:noFill/>
         </p:spPr>
         <p:txBody>
-          <a:bodyPr wrap="square" anchor="t" lIns="0" rIns="0" tIns="0" bIns="0">
-            <a:spAutoFit/>
-          </a:bodyPr>
-          <a:lstStyle/>
-          <a:p>
-            <a:pPr algn="l">
-              <a:spcBef>
-                <a:spcPts val="0"/>
-              </a:spcBef>
-              <a:spcAft>
-                <a:spcPts val="800"/>
-              </a:spcAft>
-            </a:pPr>
+          <a:bodyPr wrap="square">
+            <a:spAutoFit/>
+          </a:bodyPr>
+          <a:lstStyle/>
+          <a:p>
+            <a:pPr algn="l"/>
             <a:r>
               <a:rPr sz="1500" b="1" i="0">
                 <a:solidFill>
@@ -6473,19 +6182,12 @@
           <a:noFill/>
         </p:spPr>
         <p:txBody>
-          <a:bodyPr wrap="square" anchor="t" lIns="0" rIns="0" tIns="0" bIns="0">
-            <a:spAutoFit/>
-          </a:bodyPr>
-          <a:lstStyle/>
-          <a:p>
-            <a:pPr algn="r">
-              <a:spcBef>
-                <a:spcPts val="0"/>
-              </a:spcBef>
-              <a:spcAft>
-                <a:spcPts val="800"/>
-              </a:spcAft>
-            </a:pPr>
+          <a:bodyPr wrap="square">
+            <a:spAutoFit/>
+          </a:bodyPr>
+          <a:lstStyle/>
+          <a:p>
+            <a:pPr algn="r"/>
             <a:r>
               <a:rPr sz="1300" b="0" i="0">
                 <a:solidFill>
@@ -6506,28 +6208,21 @@
         </p:nvSpPr>
         <p:spPr>
           <a:xfrm>
-            <a:off x="457200" y="685800"/>
-            <a:ext cx="11277295" cy="457200"/>
-          </a:xfrm>
-          <a:prstGeom prst="rect">
-            <a:avLst/>
-          </a:prstGeom>
-          <a:noFill/>
-        </p:spPr>
-        <p:txBody>
-          <a:bodyPr wrap="square" anchor="t" lIns="0" rIns="0" tIns="0" bIns="0">
-            <a:spAutoFit/>
-          </a:bodyPr>
-          <a:lstStyle/>
-          <a:p>
-            <a:pPr algn="l">
-              <a:spcBef>
-                <a:spcPts val="0"/>
-              </a:spcBef>
-              <a:spcAft>
-                <a:spcPts val="800"/>
-              </a:spcAft>
-            </a:pPr>
+            <a:off x="457200" y="777240"/>
+            <a:ext cx="11277295" cy="450000"/>
+          </a:xfrm>
+          <a:prstGeom prst="rect">
+            <a:avLst/>
+          </a:prstGeom>
+          <a:noFill/>
+        </p:spPr>
+        <p:txBody>
+          <a:bodyPr wrap="square">
+            <a:spAutoFit/>
+          </a:bodyPr>
+          <a:lstStyle/>
+          <a:p>
+            <a:pPr algn="l"/>
             <a:r>
               <a:rPr sz="2800" b="1" i="0">
                 <a:solidFill>
@@ -6535,7 +6230,7 @@
                 </a:solidFill>
                 <a:latin typeface="Arial"/>
               </a:rPr>
-              <a:t>Equations Championship</a:t>
+              <a:t>Percentage Relay Review</a:t>
             </a:r>
           </a:p>
         </p:txBody>
@@ -6548,36 +6243,29 @@
         </p:nvSpPr>
         <p:spPr>
           <a:xfrm>
-            <a:off x="457200" y="1170432"/>
-            <a:ext cx="11277295" cy="502920"/>
-          </a:xfrm>
-          <a:prstGeom prst="rect">
-            <a:avLst/>
-          </a:prstGeom>
-          <a:noFill/>
-        </p:spPr>
-        <p:txBody>
-          <a:bodyPr wrap="square" anchor="t" lIns="0" rIns="0" tIns="0" bIns="0">
-            <a:spAutoFit/>
-          </a:bodyPr>
-          <a:lstStyle/>
-          <a:p>
-            <a:pPr algn="l">
-              <a:spcBef>
-                <a:spcPts val="0"/>
-              </a:spcBef>
-              <a:spcAft>
-                <a:spcPts val="0"/>
-              </a:spcAft>
-            </a:pPr>
-            <a:r>
-              <a:rPr sz="1300" b="0" i="1">
+            <a:off x="457200" y="1300000"/>
+            <a:ext cx="11277295" cy="500000"/>
+          </a:xfrm>
+          <a:prstGeom prst="rect">
+            <a:avLst/>
+          </a:prstGeom>
+          <a:noFill/>
+        </p:spPr>
+        <p:txBody>
+          <a:bodyPr wrap="square">
+            <a:spAutoFit/>
+          </a:bodyPr>
+          <a:lstStyle/>
+          <a:p>
+            <a:pPr algn="l"/>
+            <a:r>
+              <a:rPr sz="1300" b="0" i="0">
                 <a:solidFill>
                   <a:srgbClr val="595959"/>
                 </a:solidFill>
                 <a:latin typeface="Arial"/>
               </a:rPr>
-              <a:t>4 teams. Each round every team solves the same equation on whiteboards — correct teams score a point, fastest correct team gets a bonus.</a:t>
+              <a:t>Mixed relay covering weeks 1–2. Read each question; students choose the correct method before calculating.</a:t>
             </a:r>
           </a:p>
         </p:txBody>
@@ -6590,408 +6278,555 @@
         </p:nvSpPr>
         <p:spPr>
           <a:xfrm>
-            <a:off x="457200" y="1874519"/>
-            <a:ext cx="5455767" cy="971550"/>
-          </a:xfrm>
-          <a:prstGeom prst="rect">
-            <a:avLst/>
-          </a:prstGeom>
-          <a:noFill/>
-        </p:spPr>
-        <p:txBody>
-          <a:bodyPr wrap="square" anchor="ctr" lIns="0" rIns="0" tIns="0" bIns="0">
+            <a:off x="457200" y="1750000"/>
+            <a:ext cx="2000000" cy="250000"/>
+          </a:xfrm>
+          <a:prstGeom prst="rect">
+            <a:avLst/>
+          </a:prstGeom>
+          <a:noFill/>
+        </p:spPr>
+        <p:txBody>
+          <a:bodyPr wrap="square">
             <a:spAutoFit/>
           </a:bodyPr>
           <a:lstStyle/>
           <a:p>
             <a:pPr algn="l"/>
             <a:r>
+              <a:rPr sz="1300" b="1" i="0">
+                <a:solidFill>
+                  <a:srgbClr val="595959"/>
+                </a:solidFill>
+                <a:latin typeface="Arial"/>
+              </a:rPr>
+              <a:t>Grid numbers:</a:t>
+            </a:r>
+          </a:p>
+        </p:txBody>
+      </p:sp>
+      <p:sp>
+        <p:nvSpPr>
+          <p:cNvPr id="7" name="TextBox 6"/>
+          <p:cNvSpPr txBox="1"/>
+          <p:nvPr/>
+        </p:nvSpPr>
+        <p:spPr>
+          <a:xfrm>
+            <a:off x="2457200" y="1750000"/>
+            <a:ext cx="900000" cy="250000"/>
+          </a:xfrm>
+          <a:prstGeom prst="rect">
+            <a:avLst/>
+          </a:prstGeom>
+          <a:noFill/>
+        </p:spPr>
+        <p:txBody>
+          <a:bodyPr wrap="square">
+            <a:spAutoFit/>
+          </a:bodyPr>
+          <a:lstStyle/>
+          <a:p>
+            <a:pPr algn="l"/>
+            <a:r>
               <a:rPr sz="1500" b="1" i="0">
                 <a:solidFill>
                   <a:srgbClr val="000000"/>
                 </a:solidFill>
                 <a:latin typeface="Arial"/>
               </a:rPr>
-              <a:t>1. x − 9 = -14   </a:t>
-            </a:r>
+              <a:t>91</a:t>
+            </a:r>
+          </a:p>
+        </p:txBody>
+      </p:sp>
+      <p:sp>
+        <p:nvSpPr>
+          <p:cNvPr id="8" name="TextBox 7"/>
+          <p:cNvSpPr txBox="1"/>
+          <p:nvPr/>
+        </p:nvSpPr>
+        <p:spPr>
+          <a:xfrm>
+            <a:off x="3407200" y="1750000"/>
+            <a:ext cx="900000" cy="250000"/>
+          </a:xfrm>
+          <a:prstGeom prst="rect">
+            <a:avLst/>
+          </a:prstGeom>
+          <a:noFill/>
+        </p:spPr>
+        <p:txBody>
+          <a:bodyPr wrap="square">
+            <a:spAutoFit/>
+          </a:bodyPr>
+          <a:lstStyle/>
+          <a:p>
+            <a:pPr algn="l"/>
             <a:r>
               <a:rPr sz="1500" b="1" i="0">
                 <a:solidFill>
+                  <a:srgbClr val="000000"/>
+                </a:solidFill>
+                <a:latin typeface="Arial"/>
+              </a:rPr>
+              <a:t>105</a:t>
+            </a:r>
+          </a:p>
+        </p:txBody>
+      </p:sp>
+      <p:sp>
+        <p:nvSpPr>
+          <p:cNvPr id="9" name="TextBox 8"/>
+          <p:cNvSpPr txBox="1"/>
+          <p:nvPr/>
+        </p:nvSpPr>
+        <p:spPr>
+          <a:xfrm>
+            <a:off x="4357200" y="1750000"/>
+            <a:ext cx="900000" cy="250000"/>
+          </a:xfrm>
+          <a:prstGeom prst="rect">
+            <a:avLst/>
+          </a:prstGeom>
+          <a:noFill/>
+        </p:spPr>
+        <p:txBody>
+          <a:bodyPr wrap="square">
+            <a:spAutoFit/>
+          </a:bodyPr>
+          <a:lstStyle/>
+          <a:p>
+            <a:pPr algn="l"/>
+            <a:r>
+              <a:rPr sz="1500" b="1" i="0">
+                <a:solidFill>
+                  <a:srgbClr val="000000"/>
+                </a:solidFill>
+                <a:latin typeface="Arial"/>
+              </a:rPr>
+              <a:t>80</a:t>
+            </a:r>
+          </a:p>
+        </p:txBody>
+      </p:sp>
+      <p:sp>
+        <p:nvSpPr>
+          <p:cNvPr id="10" name="TextBox 9"/>
+          <p:cNvSpPr txBox="1"/>
+          <p:nvPr/>
+        </p:nvSpPr>
+        <p:spPr>
+          <a:xfrm>
+            <a:off x="5307200" y="1750000"/>
+            <a:ext cx="900000" cy="250000"/>
+          </a:xfrm>
+          <a:prstGeom prst="rect">
+            <a:avLst/>
+          </a:prstGeom>
+          <a:noFill/>
+        </p:spPr>
+        <p:txBody>
+          <a:bodyPr wrap="square">
+            <a:spAutoFit/>
+          </a:bodyPr>
+          <a:lstStyle/>
+          <a:p>
+            <a:pPr algn="l"/>
+            <a:r>
+              <a:rPr sz="1500" b="1" i="0">
+                <a:solidFill>
+                  <a:srgbClr val="000000"/>
+                </a:solidFill>
+                <a:latin typeface="Arial"/>
+              </a:rPr>
+              <a:t>576</a:t>
+            </a:r>
+          </a:p>
+        </p:txBody>
+      </p:sp>
+      <p:sp>
+        <p:nvSpPr>
+          <p:cNvPr id="11" name="TextBox 10"/>
+          <p:cNvSpPr txBox="1"/>
+          <p:nvPr/>
+        </p:nvSpPr>
+        <p:spPr>
+          <a:xfrm>
+            <a:off x="457200" y="2150000"/>
+            <a:ext cx="5450000" cy="330000"/>
+          </a:xfrm>
+          <a:prstGeom prst="rect">
+            <a:avLst/>
+          </a:prstGeom>
+          <a:noFill/>
+        </p:spPr>
+        <p:txBody>
+          <a:bodyPr wrap="square">
+            <a:spAutoFit/>
+          </a:bodyPr>
+          <a:lstStyle/>
+          <a:p>
+            <a:r>
+              <a:rPr sz="1500" b="1">
+                <a:solidFill>
+                  <a:srgbClr val="000000"/>
+                </a:solidFill>
+                <a:latin typeface="Arial"/>
+              </a:rPr>
+              <a:t>1. Find 30% of £90?   </a:t>
+            </a:r>
+            <a:r>
+              <a:rPr sz="1500" b="1">
+                <a:solidFill>
                   <a:srgbClr val="2B6B3D"/>
                 </a:solidFill>
                 <a:latin typeface="Arial"/>
               </a:rPr>
-              <a:t>x = -5</a:t>
-            </a:r>
-          </a:p>
-        </p:txBody>
-      </p:sp>
-      <p:sp>
-        <p:nvSpPr>
-          <p:cNvPr id="7" name="TextBox 6"/>
-          <p:cNvSpPr txBox="1"/>
-          <p:nvPr/>
-        </p:nvSpPr>
-        <p:spPr>
-          <a:xfrm>
-            <a:off x="457200" y="2846069"/>
-            <a:ext cx="5455767" cy="971550"/>
-          </a:xfrm>
-          <a:prstGeom prst="rect">
-            <a:avLst/>
-          </a:prstGeom>
-          <a:noFill/>
-        </p:spPr>
-        <p:txBody>
-          <a:bodyPr wrap="square" anchor="ctr" lIns="0" rIns="0" tIns="0" bIns="0">
+              <a:t>£27</a:t>
+            </a:r>
+          </a:p>
+        </p:txBody>
+      </p:sp>
+      <p:sp>
+        <p:nvSpPr>
+          <p:cNvPr id="12" name="TextBox 11"/>
+          <p:cNvSpPr txBox="1"/>
+          <p:nvPr/>
+        </p:nvSpPr>
+        <p:spPr>
+          <a:xfrm>
+            <a:off x="457200" y="2480000"/>
+            <a:ext cx="5450000" cy="330000"/>
+          </a:xfrm>
+          <a:prstGeom prst="rect">
+            <a:avLst/>
+          </a:prstGeom>
+          <a:noFill/>
+        </p:spPr>
+        <p:txBody>
+          <a:bodyPr wrap="square">
+            <a:spAutoFit/>
+          </a:bodyPr>
+          <a:lstStyle/>
+          <a:p>
+            <a:r>
+              <a:rPr sz="1500" b="1">
+                <a:solidFill>
+                  <a:srgbClr val="000000"/>
+                </a:solidFill>
+                <a:latin typeface="Arial"/>
+              </a:rPr>
+              <a:t>2. Increase £70 by 10%?   </a:t>
+            </a:r>
+            <a:r>
+              <a:rPr sz="1500" b="1">
+                <a:solidFill>
+                  <a:srgbClr val="2B6B3D"/>
+                </a:solidFill>
+                <a:latin typeface="Arial"/>
+              </a:rPr>
+              <a:t>£77</a:t>
+            </a:r>
+          </a:p>
+        </p:txBody>
+      </p:sp>
+      <p:sp>
+        <p:nvSpPr>
+          <p:cNvPr id="13" name="TextBox 12"/>
+          <p:cNvSpPr txBox="1"/>
+          <p:nvPr/>
+        </p:nvSpPr>
+        <p:spPr>
+          <a:xfrm>
+            <a:off x="457200" y="2810000"/>
+            <a:ext cx="5450000" cy="330000"/>
+          </a:xfrm>
+          <a:prstGeom prst="rect">
+            <a:avLst/>
+          </a:prstGeom>
+          <a:noFill/>
+        </p:spPr>
+        <p:txBody>
+          <a:bodyPr wrap="square">
+            <a:spAutoFit/>
+          </a:bodyPr>
+          <a:lstStyle/>
+          <a:p>
+            <a:r>
+              <a:rPr sz="1500" b="1">
+                <a:solidFill>
+                  <a:srgbClr val="000000"/>
+                </a:solidFill>
+                <a:latin typeface="Arial"/>
+              </a:rPr>
+              <a:t>3. Original price if £72 is after 20% off?   </a:t>
+            </a:r>
+            <a:r>
+              <a:rPr sz="1500" b="1">
+                <a:solidFill>
+                  <a:srgbClr val="2B6B3D"/>
+                </a:solidFill>
+                <a:latin typeface="Arial"/>
+              </a:rPr>
+              <a:t>£90</a:t>
+            </a:r>
+          </a:p>
+        </p:txBody>
+      </p:sp>
+      <p:sp>
+        <p:nvSpPr>
+          <p:cNvPr id="14" name="TextBox 13"/>
+          <p:cNvSpPr txBox="1"/>
+          <p:nvPr/>
+        </p:nvSpPr>
+        <p:spPr>
+          <a:xfrm>
+            <a:off x="457200" y="3140000"/>
+            <a:ext cx="5450000" cy="330000"/>
+          </a:xfrm>
+          <a:prstGeom prst="rect">
+            <a:avLst/>
+          </a:prstGeom>
+          <a:noFill/>
+        </p:spPr>
+        <p:txBody>
+          <a:bodyPr wrap="square">
+            <a:spAutoFit/>
+          </a:bodyPr>
+          <a:lstStyle/>
+          <a:p>
+            <a:r>
+              <a:rPr sz="1500" b="1">
+                <a:solidFill>
+                  <a:srgbClr val="000000"/>
+                </a:solidFill>
+                <a:latin typeface="Arial"/>
+              </a:rPr>
+              <a:t>4. Convert 0.85 to a percentage?   </a:t>
+            </a:r>
+            <a:r>
+              <a:rPr sz="1500" b="1">
+                <a:solidFill>
+                  <a:srgbClr val="2B6B3D"/>
+                </a:solidFill>
+                <a:latin typeface="Arial"/>
+              </a:rPr>
+              <a:t>85%</a:t>
+            </a:r>
+          </a:p>
+        </p:txBody>
+      </p:sp>
+      <p:sp>
+        <p:nvSpPr>
+          <p:cNvPr id="15" name="TextBox 14"/>
+          <p:cNvSpPr txBox="1"/>
+          <p:nvPr/>
+        </p:nvSpPr>
+        <p:spPr>
+          <a:xfrm>
+            <a:off x="6284495" y="2150000"/>
+            <a:ext cx="5450000" cy="330000"/>
+          </a:xfrm>
+          <a:prstGeom prst="rect">
+            <a:avLst/>
+          </a:prstGeom>
+          <a:noFill/>
+        </p:spPr>
+        <p:txBody>
+          <a:bodyPr wrap="square">
+            <a:spAutoFit/>
+          </a:bodyPr>
+          <a:lstStyle/>
+          <a:p>
+            <a:r>
+              <a:rPr sz="1500" b="1">
+                <a:solidFill>
+                  <a:srgbClr val="000000"/>
+                </a:solidFill>
+                <a:latin typeface="Arial"/>
+              </a:rPr>
+              <a:t>5. Decrease £160 by 25%?   </a:t>
+            </a:r>
+            <a:r>
+              <a:rPr sz="1500" b="1">
+                <a:solidFill>
+                  <a:srgbClr val="2B6B3D"/>
+                </a:solidFill>
+                <a:latin typeface="Arial"/>
+              </a:rPr>
+              <a:t>£120</a:t>
+            </a:r>
+          </a:p>
+        </p:txBody>
+      </p:sp>
+      <p:sp>
+        <p:nvSpPr>
+          <p:cNvPr id="16" name="TextBox 15"/>
+          <p:cNvSpPr txBox="1"/>
+          <p:nvPr/>
+        </p:nvSpPr>
+        <p:spPr>
+          <a:xfrm>
+            <a:off x="6284495" y="2480000"/>
+            <a:ext cx="5450000" cy="330000"/>
+          </a:xfrm>
+          <a:prstGeom prst="rect">
+            <a:avLst/>
+          </a:prstGeom>
+          <a:noFill/>
+        </p:spPr>
+        <p:txBody>
+          <a:bodyPr wrap="square">
+            <a:spAutoFit/>
+          </a:bodyPr>
+          <a:lstStyle/>
+          <a:p>
+            <a:r>
+              <a:rPr sz="1500" b="1">
+                <a:solidFill>
+                  <a:srgbClr val="000000"/>
+                </a:solidFill>
+                <a:latin typeface="Arial"/>
+              </a:rPr>
+              <a:t>6. Original price if £115 is after 15% VAT?   </a:t>
+            </a:r>
+            <a:r>
+              <a:rPr sz="1500" b="1">
+                <a:solidFill>
+                  <a:srgbClr val="2B6B3D"/>
+                </a:solidFill>
+                <a:latin typeface="Arial"/>
+              </a:rPr>
+              <a:t>£100</a:t>
+            </a:r>
+          </a:p>
+        </p:txBody>
+      </p:sp>
+      <p:sp>
+        <p:nvSpPr>
+          <p:cNvPr id="17" name="TextBox 16"/>
+          <p:cNvSpPr txBox="1"/>
+          <p:nvPr/>
+        </p:nvSpPr>
+        <p:spPr>
+          <a:xfrm>
+            <a:off x="6284495" y="2810000"/>
+            <a:ext cx="5450000" cy="330000"/>
+          </a:xfrm>
+          <a:prstGeom prst="rect">
+            <a:avLst/>
+          </a:prstGeom>
+          <a:noFill/>
+        </p:spPr>
+        <p:txBody>
+          <a:bodyPr wrap="square">
+            <a:spAutoFit/>
+          </a:bodyPr>
+          <a:lstStyle/>
+          <a:p>
+            <a:r>
+              <a:rPr sz="1500" b="1">
+                <a:solidFill>
+                  <a:srgbClr val="000000"/>
+                </a:solidFill>
+                <a:latin typeface="Arial"/>
+              </a:rPr>
+              <a:t>7. Find 8% of £250?   </a:t>
+            </a:r>
+            <a:r>
+              <a:rPr sz="1500" b="1">
+                <a:solidFill>
+                  <a:srgbClr val="2B6B3D"/>
+                </a:solidFill>
+                <a:latin typeface="Arial"/>
+              </a:rPr>
+              <a:t>£20</a:t>
+            </a:r>
+          </a:p>
+        </p:txBody>
+      </p:sp>
+      <p:sp>
+        <p:nvSpPr>
+          <p:cNvPr id="18" name="TextBox 17"/>
+          <p:cNvSpPr txBox="1"/>
+          <p:nvPr/>
+        </p:nvSpPr>
+        <p:spPr>
+          <a:xfrm>
+            <a:off x="6284495" y="3140000"/>
+            <a:ext cx="5450000" cy="330000"/>
+          </a:xfrm>
+          <a:prstGeom prst="rect">
+            <a:avLst/>
+          </a:prstGeom>
+          <a:noFill/>
+        </p:spPr>
+        <p:txBody>
+          <a:bodyPr wrap="square">
+            <a:spAutoFit/>
+          </a:bodyPr>
+          <a:lstStyle/>
+          <a:p>
+            <a:r>
+              <a:rPr sz="1500" b="1">
+                <a:solidFill>
+                  <a:srgbClr val="000000"/>
+                </a:solidFill>
+                <a:latin typeface="Arial"/>
+              </a:rPr>
+              <a:t>8. Convert 9/20 to a percentage?   </a:t>
+            </a:r>
+            <a:r>
+              <a:rPr sz="1500" b="1">
+                <a:solidFill>
+                  <a:srgbClr val="2B6B3D"/>
+                </a:solidFill>
+                <a:latin typeface="Arial"/>
+              </a:rPr>
+              <a:t>45%</a:t>
+            </a:r>
+          </a:p>
+        </p:txBody>
+      </p:sp>
+      <p:sp>
+        <p:nvSpPr>
+          <p:cNvPr id="19" name="TextBox 18"/>
+          <p:cNvSpPr txBox="1"/>
+          <p:nvPr/>
+        </p:nvSpPr>
+        <p:spPr>
+          <a:xfrm>
+            <a:off x="457200" y="3620000"/>
+            <a:ext cx="11277295" cy="400000"/>
+          </a:xfrm>
+          <a:prstGeom prst="rect">
+            <a:avLst/>
+          </a:prstGeom>
+          <a:noFill/>
+        </p:spPr>
+        <p:txBody>
+          <a:bodyPr wrap="square">
             <a:spAutoFit/>
           </a:bodyPr>
           <a:lstStyle/>
           <a:p>
             <a:pPr algn="l"/>
             <a:r>
-              <a:rPr sz="1500" b="1" i="0">
+              <a:rPr sz="1600" b="1" i="0">
                 <a:solidFill>
                   <a:srgbClr val="000000"/>
                 </a:solidFill>
                 <a:latin typeface="Arial"/>
               </a:rPr>
-              <a:t>2. 6x = -42   </a:t>
-            </a:r>
-            <a:r>
-              <a:rPr sz="1500" b="1" i="0">
-                <a:solidFill>
-                  <a:srgbClr val="2B6B3D"/>
-                </a:solidFill>
-                <a:latin typeface="Arial"/>
-              </a:rPr>
-              <a:t>x = -7</a:t>
-            </a:r>
-          </a:p>
-        </p:txBody>
-      </p:sp>
-      <p:sp>
-        <p:nvSpPr>
-          <p:cNvPr id="8" name="TextBox 7"/>
-          <p:cNvSpPr txBox="1"/>
-          <p:nvPr/>
-        </p:nvSpPr>
-        <p:spPr>
-          <a:xfrm>
-            <a:off x="457200" y="3817619"/>
-            <a:ext cx="5455767" cy="971550"/>
-          </a:xfrm>
-          <a:prstGeom prst="rect">
-            <a:avLst/>
-          </a:prstGeom>
-          <a:noFill/>
-        </p:spPr>
-        <p:txBody>
-          <a:bodyPr wrap="square" anchor="ctr" lIns="0" rIns="0" tIns="0" bIns="0">
-            <a:spAutoFit/>
-          </a:bodyPr>
-          <a:lstStyle/>
-          <a:p>
-            <a:pPr algn="l"/>
-            <a:r>
-              <a:rPr sz="1500" b="1" i="0">
-                <a:solidFill>
-                  <a:srgbClr val="000000"/>
-                </a:solidFill>
-                <a:latin typeface="Arial"/>
-              </a:rPr>
-              <a:t>3. 3x + 5 = 23   </a:t>
-            </a:r>
-            <a:r>
-              <a:rPr sz="1500" b="1" i="0">
-                <a:solidFill>
-                  <a:srgbClr val="2B6B3D"/>
-                </a:solidFill>
-                <a:latin typeface="Arial"/>
-              </a:rPr>
-              <a:t>x = 6</a:t>
-            </a:r>
-          </a:p>
-        </p:txBody>
-      </p:sp>
-      <p:sp>
-        <p:nvSpPr>
-          <p:cNvPr id="9" name="TextBox 8"/>
-          <p:cNvSpPr txBox="1"/>
-          <p:nvPr/>
-        </p:nvSpPr>
-        <p:spPr>
-          <a:xfrm>
-            <a:off x="457200" y="4789169"/>
-            <a:ext cx="5455767" cy="971550"/>
-          </a:xfrm>
-          <a:prstGeom prst="rect">
-            <a:avLst/>
-          </a:prstGeom>
-          <a:noFill/>
-        </p:spPr>
-        <p:txBody>
-          <a:bodyPr wrap="square" anchor="ctr" lIns="0" rIns="0" tIns="0" bIns="0">
-            <a:spAutoFit/>
-          </a:bodyPr>
-          <a:lstStyle/>
-          <a:p>
-            <a:pPr algn="l"/>
-            <a:r>
-              <a:rPr sz="1500" b="1" i="0">
-                <a:solidFill>
-                  <a:srgbClr val="000000"/>
-                </a:solidFill>
-                <a:latin typeface="Arial"/>
-              </a:rPr>
-              <a:t>4. -4x + 7 = 19   </a:t>
-            </a:r>
-            <a:r>
-              <a:rPr sz="1500" b="1" i="0">
-                <a:solidFill>
-                  <a:srgbClr val="2B6B3D"/>
-                </a:solidFill>
-                <a:latin typeface="Arial"/>
-              </a:rPr>
-              <a:t>x = -3</a:t>
-            </a:r>
-          </a:p>
-        </p:txBody>
-      </p:sp>
-      <p:sp>
-        <p:nvSpPr>
-          <p:cNvPr id="10" name="TextBox 9"/>
-          <p:cNvSpPr txBox="1"/>
-          <p:nvPr/>
-        </p:nvSpPr>
-        <p:spPr>
-          <a:xfrm>
-            <a:off x="6278727" y="1874519"/>
-            <a:ext cx="5455767" cy="971550"/>
-          </a:xfrm>
-          <a:prstGeom prst="rect">
-            <a:avLst/>
-          </a:prstGeom>
-          <a:noFill/>
-        </p:spPr>
-        <p:txBody>
-          <a:bodyPr wrap="square" anchor="ctr" lIns="0" rIns="0" tIns="0" bIns="0">
-            <a:spAutoFit/>
-          </a:bodyPr>
-          <a:lstStyle/>
-          <a:p>
-            <a:pPr algn="l"/>
-            <a:r>
-              <a:rPr sz="1500" b="1" i="0">
-                <a:solidFill>
-                  <a:srgbClr val="000000"/>
-                </a:solidFill>
-                <a:latin typeface="Arial"/>
-              </a:rPr>
-              <a:t>5. x ÷ 5 − 3 = 1   </a:t>
-            </a:r>
-            <a:r>
-              <a:rPr sz="1500" b="1" i="0">
-                <a:solidFill>
-                  <a:srgbClr val="2B6B3D"/>
-                </a:solidFill>
-                <a:latin typeface="Arial"/>
-              </a:rPr>
-              <a:t>x = 20</a:t>
-            </a:r>
-          </a:p>
-        </p:txBody>
-      </p:sp>
-      <p:sp>
-        <p:nvSpPr>
-          <p:cNvPr id="11" name="TextBox 10"/>
-          <p:cNvSpPr txBox="1"/>
-          <p:nvPr/>
-        </p:nvSpPr>
-        <p:spPr>
-          <a:xfrm>
-            <a:off x="6278727" y="2846069"/>
-            <a:ext cx="5455767" cy="971550"/>
-          </a:xfrm>
-          <a:prstGeom prst="rect">
-            <a:avLst/>
-          </a:prstGeom>
-          <a:noFill/>
-        </p:spPr>
-        <p:txBody>
-          <a:bodyPr wrap="square" anchor="ctr" lIns="0" rIns="0" tIns="0" bIns="0">
-            <a:spAutoFit/>
-          </a:bodyPr>
-          <a:lstStyle/>
-          <a:p>
-            <a:pPr algn="l"/>
-            <a:r>
-              <a:rPr sz="1500" b="1" i="0">
-                <a:solidFill>
-                  <a:srgbClr val="000000"/>
-                </a:solidFill>
-                <a:latin typeface="Arial"/>
-              </a:rPr>
-              <a:t>6. 8x − 6 = 18   </a:t>
-            </a:r>
-            <a:r>
-              <a:rPr sz="1500" b="1" i="0">
-                <a:solidFill>
-                  <a:srgbClr val="2B6B3D"/>
-                </a:solidFill>
-                <a:latin typeface="Arial"/>
-              </a:rPr>
-              <a:t>x = 3</a:t>
-            </a:r>
-          </a:p>
-        </p:txBody>
-      </p:sp>
-      <p:sp>
-        <p:nvSpPr>
-          <p:cNvPr id="12" name="TextBox 11"/>
-          <p:cNvSpPr txBox="1"/>
-          <p:nvPr/>
-        </p:nvSpPr>
-        <p:spPr>
-          <a:xfrm>
-            <a:off x="6278727" y="3817619"/>
-            <a:ext cx="5455767" cy="971550"/>
-          </a:xfrm>
-          <a:prstGeom prst="rect">
-            <a:avLst/>
-          </a:prstGeom>
-          <a:noFill/>
-        </p:spPr>
-        <p:txBody>
-          <a:bodyPr wrap="square" anchor="ctr" lIns="0" rIns="0" tIns="0" bIns="0">
-            <a:spAutoFit/>
-          </a:bodyPr>
-          <a:lstStyle/>
-          <a:p>
-            <a:pPr algn="l"/>
-            <a:r>
-              <a:rPr sz="1500" b="1" i="0">
-                <a:solidFill>
-                  <a:srgbClr val="000000"/>
-                </a:solidFill>
-                <a:latin typeface="Arial"/>
-              </a:rPr>
-              <a:t>7. x + 16 = -2   </a:t>
-            </a:r>
-            <a:r>
-              <a:rPr sz="1500" b="1" i="0">
-                <a:solidFill>
-                  <a:srgbClr val="2B6B3D"/>
-                </a:solidFill>
-                <a:latin typeface="Arial"/>
-              </a:rPr>
-              <a:t>x = -18</a:t>
-            </a:r>
-          </a:p>
-        </p:txBody>
-      </p:sp>
-      <p:sp>
-        <p:nvSpPr>
-          <p:cNvPr id="13" name="TextBox 12"/>
-          <p:cNvSpPr txBox="1"/>
-          <p:nvPr/>
-        </p:nvSpPr>
-        <p:spPr>
-          <a:xfrm>
-            <a:off x="6278727" y="4789169"/>
-            <a:ext cx="5455767" cy="971550"/>
-          </a:xfrm>
-          <a:prstGeom prst="rect">
-            <a:avLst/>
-          </a:prstGeom>
-          <a:noFill/>
-        </p:spPr>
-        <p:txBody>
-          <a:bodyPr wrap="square" anchor="ctr" lIns="0" rIns="0" tIns="0" bIns="0">
-            <a:spAutoFit/>
-          </a:bodyPr>
-          <a:lstStyle/>
-          <a:p>
-            <a:pPr algn="l"/>
-            <a:r>
-              <a:rPr sz="1500" b="1" i="0">
-                <a:solidFill>
-                  <a:srgbClr val="000000"/>
-                </a:solidFill>
-                <a:latin typeface="Arial"/>
-              </a:rPr>
-              <a:t>8. -2x − 5 = 9   </a:t>
-            </a:r>
-            <a:r>
-              <a:rPr sz="1500" b="1" i="0">
-                <a:solidFill>
-                  <a:srgbClr val="2B6B3D"/>
-                </a:solidFill>
-                <a:latin typeface="Arial"/>
-              </a:rPr>
-              <a:t>x = -7</a:t>
-            </a:r>
-          </a:p>
-        </p:txBody>
-      </p:sp>
-      <p:sp>
-        <p:nvSpPr>
-          <p:cNvPr id="14" name="Rounded Rectangle 13"/>
-          <p:cNvSpPr/>
-          <p:nvPr/>
-        </p:nvSpPr>
-        <p:spPr>
-          <a:xfrm>
-            <a:off x="457200" y="5897880"/>
-            <a:ext cx="11277295" cy="548640"/>
-          </a:xfrm>
-          <a:prstGeom prst="roundRect">
-            <a:avLst/>
-          </a:prstGeom>
-          <a:solidFill>
-            <a:srgbClr val="F2F2F2"/>
-          </a:solidFill>
-          <a:ln w="9525">
-            <a:solidFill>
-              <a:srgbClr val="CCCCCC"/>
-            </a:solidFill>
-          </a:ln>
-          <a:effectLst/>
-        </p:spPr>
-        <p:style>
-          <a:lnRef idx="1">
-            <a:schemeClr val="accent1"/>
-          </a:lnRef>
-          <a:fillRef idx="3">
-            <a:schemeClr val="accent1"/>
-          </a:fillRef>
-          <a:effectRef idx="2">
-            <a:schemeClr val="accent1"/>
-          </a:effectRef>
-          <a:fontRef idx="minor">
-            <a:schemeClr val="lt1"/>
-          </a:fontRef>
-        </p:style>
-        <p:txBody>
-          <a:bodyPr rtlCol="0" anchor="ctr" wrap="square" lIns="274320" rIns="274320"/>
-          <a:lstStyle/>
-          <a:p>
-            <a:pPr algn="ctr"/>
-            <a:r>
-              <a:rPr sz="1600" b="1" i="0">
-                <a:solidFill>
-                  <a:srgbClr val="000000"/>
-                </a:solidFill>
-                <a:latin typeface="Arial"/>
-              </a:rPr>
-              <a:t>Exit check: Solve 5x − 6 = 14 and check your answer.</a:t>
-            </a:r>
-          </a:p>
-        </p:txBody>
-      </p:sp>
-      <p:sp>
-        <p:nvSpPr>
-          <p:cNvPr id="15" name="TextBox 14"/>
+              <a:t>Exit check: Which method would you use to find the original price before a 20% increase, and why?</a:t>
+            </a:r>
+          </a:p>
+        </p:txBody>
+      </p:sp>
+      <p:sp>
+        <p:nvSpPr>
+          <p:cNvPr id="20" name="TextBox 19"/>
           <p:cNvSpPr txBox="1"/>
           <p:nvPr/>
         </p:nvSpPr>
@@ -7006,19 +6841,12 @@
           <a:noFill/>
         </p:spPr>
         <p:txBody>
-          <a:bodyPr wrap="square" anchor="t" lIns="0" rIns="0" tIns="0" bIns="0">
-            <a:spAutoFit/>
-          </a:bodyPr>
-          <a:lstStyle/>
-          <a:p>
-            <a:pPr algn="l">
-              <a:spcBef>
-                <a:spcPts val="0"/>
-              </a:spcBef>
-              <a:spcAft>
-                <a:spcPts val="800"/>
-              </a:spcAft>
-            </a:pPr>
+          <a:bodyPr wrap="square">
+            <a:spAutoFit/>
+          </a:bodyPr>
+          <a:lstStyle/>
+          <a:p>
+            <a:pPr algn="l"/>
             <a:r>
               <a:rPr sz="1100" b="0" i="0">
                 <a:solidFill>
@@ -7026,7 +6854,7 @@
                 </a:solidFill>
                 <a:latin typeface="Arial"/>
               </a:rPr>
-              <a:t>Y8 Solving Linear Equations — Lower-to-Middle Set</a:t>
+              <a:t>Y8 Percentages and Proportionality — Middle Set</a:t>
             </a:r>
           </a:p>
         </p:txBody>
